--- a/exports/pptx/lessons/primary-module-05-dot-addition/day-06-meet-the-dot.pptx
+++ b/exports/pptx/lessons/primary-module-05-dot-addition/day-06-meet-the-dot.pptx
@@ -16,9 +16,12 @@
     <p:sldId id="264" r:id="rId10"/>
     <p:sldId id="265" r:id="rId11"/>
     <p:sldId id="266" r:id="rId12"/>
+    <p:sldId id="267" r:id="rId13"/>
+    <p:sldId id="268" r:id="rId14"/>
+    <p:sldId id="269" r:id="rId15"/>
   </p:sldIdLst>
   <p:notesMasterIdLst>
-    <p:notesMasterId r:id="rId13"/>
+    <p:notesMasterId r:id="rId16"/>
   </p:notesMasterIdLst>
   <p:sldSz cx="9144000" cy="5143500"/>
   <p:notesSz cx="5143500" cy="9144000"/>
@@ -712,6 +715,270 @@
             <a:fld id="{F7021451-1387-4CA6-816F-3879F97B5CBC}" type="slidenum">
               <a:rPr lang="en-US"/>
               <a:t>11</a:t>
+            </a:fld>
+            <a:endParaRPr lang="en-US"/>
+          </a:p>
+        </p:txBody>
+      </p:sp>
+    </p:spTree>
+    <p:extLst>
+      <p:ext uri="{BB962C8B-B14F-4D97-AF65-F5344CB8AC3E}">
+        <p14:creationId xmlns:p14="http://schemas.microsoft.com/office/powerpoint/2010/main" val="1024086991"/>
+      </p:ext>
+    </p:extLst>
+  </p:cSld>
+  <p:clrMapOvr>
+    <a:masterClrMapping/>
+  </p:clrMapOvr>
+</p:notes>
+</file>
+
+<file path=ppt/notesSlides/notesSlide12.xml><?xml version="1.0" encoding="utf-8"?>
+<p:notes xmlns:a="http://schemas.openxmlformats.org/drawingml/2006/main" xmlns:r="http://schemas.openxmlformats.org/officeDocument/2006/relationships" xmlns:p="http://schemas.openxmlformats.org/presentationml/2006/main">
+  <p:cSld>
+    <p:spTree>
+      <p:nvGrpSpPr>
+        <p:cNvPr id="1" name=""/>
+        <p:cNvGrpSpPr/>
+        <p:nvPr/>
+      </p:nvGrpSpPr>
+      <p:grpSpPr>
+        <a:xfrm>
+          <a:off x="0" y="0"/>
+          <a:ext cx="0" cy="0"/>
+          <a:chOff x="0" y="0"/>
+          <a:chExt cx="0" cy="0"/>
+        </a:xfrm>
+      </p:grpSpPr>
+      <p:sp>
+        <p:nvSpPr>
+          <p:cNvPr id="2" name="Slide Image Placeholder 1"/>
+          <p:cNvSpPr>
+            <a:spLocks noGrp="1" noRot="1" noChangeAspect="1"/>
+          </p:cNvSpPr>
+          <p:nvPr>
+            <p:ph type="sldImg"/>
+          </p:nvPr>
+        </p:nvSpPr>
+        <p:spPr/>
+      </p:sp>
+      <p:sp>
+        <p:nvSpPr>
+          <p:cNvPr id="3" name="Notes Placeholder 2"/>
+          <p:cNvSpPr>
+            <a:spLocks noGrp="1"/>
+          </p:cNvSpPr>
+          <p:nvPr>
+            <p:ph type="body" idx="1"/>
+          </p:nvPr>
+        </p:nvSpPr>
+        <p:spPr/>
+        <p:txBody>
+          <a:bodyPr/>
+          <a:lstStyle/>
+          <a:p>
+            <a:r>
+              <a:rPr lang="en-US" dirty="0"/>
+              <a:t/>
+            </a:r>
+            <a:endParaRPr lang="en-US" dirty="0"/>
+          </a:p>
+        </p:txBody>
+      </p:sp>
+      <p:sp>
+        <p:nvSpPr>
+          <p:cNvPr id="4" name="Slide Number Placeholder 3"/>
+          <p:cNvSpPr>
+            <a:spLocks noGrp="1"/>
+          </p:cNvSpPr>
+          <p:nvPr>
+            <p:ph type="sldNum" sz="quarter" idx="10"/>
+          </p:nvPr>
+        </p:nvSpPr>
+        <p:spPr/>
+        <p:txBody>
+          <a:bodyPr/>
+          <a:lstStyle/>
+          <a:p>
+            <a:fld id="{F7021451-1387-4CA6-816F-3879F97B5CBC}" type="slidenum">
+              <a:rPr lang="en-US"/>
+              <a:t>12</a:t>
+            </a:fld>
+            <a:endParaRPr lang="en-US"/>
+          </a:p>
+        </p:txBody>
+      </p:sp>
+    </p:spTree>
+    <p:extLst>
+      <p:ext uri="{BB962C8B-B14F-4D97-AF65-F5344CB8AC3E}">
+        <p14:creationId xmlns:p14="http://schemas.microsoft.com/office/powerpoint/2010/main" val="1024086991"/>
+      </p:ext>
+    </p:extLst>
+  </p:cSld>
+  <p:clrMapOvr>
+    <a:masterClrMapping/>
+  </p:clrMapOvr>
+</p:notes>
+</file>
+
+<file path=ppt/notesSlides/notesSlide13.xml><?xml version="1.0" encoding="utf-8"?>
+<p:notes xmlns:a="http://schemas.openxmlformats.org/drawingml/2006/main" xmlns:r="http://schemas.openxmlformats.org/officeDocument/2006/relationships" xmlns:p="http://schemas.openxmlformats.org/presentationml/2006/main">
+  <p:cSld>
+    <p:spTree>
+      <p:nvGrpSpPr>
+        <p:cNvPr id="1" name=""/>
+        <p:cNvGrpSpPr/>
+        <p:nvPr/>
+      </p:nvGrpSpPr>
+      <p:grpSpPr>
+        <a:xfrm>
+          <a:off x="0" y="0"/>
+          <a:ext cx="0" cy="0"/>
+          <a:chOff x="0" y="0"/>
+          <a:chExt cx="0" cy="0"/>
+        </a:xfrm>
+      </p:grpSpPr>
+      <p:sp>
+        <p:nvSpPr>
+          <p:cNvPr id="2" name="Slide Image Placeholder 1"/>
+          <p:cNvSpPr>
+            <a:spLocks noGrp="1" noRot="1" noChangeAspect="1"/>
+          </p:cNvSpPr>
+          <p:nvPr>
+            <p:ph type="sldImg"/>
+          </p:nvPr>
+        </p:nvSpPr>
+        <p:spPr/>
+      </p:sp>
+      <p:sp>
+        <p:nvSpPr>
+          <p:cNvPr id="3" name="Notes Placeholder 2"/>
+          <p:cNvSpPr>
+            <a:spLocks noGrp="1"/>
+          </p:cNvSpPr>
+          <p:nvPr>
+            <p:ph type="body" idx="1"/>
+          </p:nvPr>
+        </p:nvSpPr>
+        <p:spPr/>
+        <p:txBody>
+          <a:bodyPr/>
+          <a:lstStyle/>
+          <a:p>
+            <a:r>
+              <a:rPr lang="en-US" dirty="0"/>
+              <a:t/>
+            </a:r>
+            <a:endParaRPr lang="en-US" dirty="0"/>
+          </a:p>
+        </p:txBody>
+      </p:sp>
+      <p:sp>
+        <p:nvSpPr>
+          <p:cNvPr id="4" name="Slide Number Placeholder 3"/>
+          <p:cNvSpPr>
+            <a:spLocks noGrp="1"/>
+          </p:cNvSpPr>
+          <p:nvPr>
+            <p:ph type="sldNum" sz="quarter" idx="10"/>
+          </p:nvPr>
+        </p:nvSpPr>
+        <p:spPr/>
+        <p:txBody>
+          <a:bodyPr/>
+          <a:lstStyle/>
+          <a:p>
+            <a:fld id="{F7021451-1387-4CA6-816F-3879F97B5CBC}" type="slidenum">
+              <a:rPr lang="en-US"/>
+              <a:t>13</a:t>
+            </a:fld>
+            <a:endParaRPr lang="en-US"/>
+          </a:p>
+        </p:txBody>
+      </p:sp>
+    </p:spTree>
+    <p:extLst>
+      <p:ext uri="{BB962C8B-B14F-4D97-AF65-F5344CB8AC3E}">
+        <p14:creationId xmlns:p14="http://schemas.microsoft.com/office/powerpoint/2010/main" val="1024086991"/>
+      </p:ext>
+    </p:extLst>
+  </p:cSld>
+  <p:clrMapOvr>
+    <a:masterClrMapping/>
+  </p:clrMapOvr>
+</p:notes>
+</file>
+
+<file path=ppt/notesSlides/notesSlide14.xml><?xml version="1.0" encoding="utf-8"?>
+<p:notes xmlns:a="http://schemas.openxmlformats.org/drawingml/2006/main" xmlns:r="http://schemas.openxmlformats.org/officeDocument/2006/relationships" xmlns:p="http://schemas.openxmlformats.org/presentationml/2006/main">
+  <p:cSld>
+    <p:spTree>
+      <p:nvGrpSpPr>
+        <p:cNvPr id="1" name=""/>
+        <p:cNvGrpSpPr/>
+        <p:nvPr/>
+      </p:nvGrpSpPr>
+      <p:grpSpPr>
+        <a:xfrm>
+          <a:off x="0" y="0"/>
+          <a:ext cx="0" cy="0"/>
+          <a:chOff x="0" y="0"/>
+          <a:chExt cx="0" cy="0"/>
+        </a:xfrm>
+      </p:grpSpPr>
+      <p:sp>
+        <p:nvSpPr>
+          <p:cNvPr id="2" name="Slide Image Placeholder 1"/>
+          <p:cNvSpPr>
+            <a:spLocks noGrp="1" noRot="1" noChangeAspect="1"/>
+          </p:cNvSpPr>
+          <p:nvPr>
+            <p:ph type="sldImg"/>
+          </p:nvPr>
+        </p:nvSpPr>
+        <p:spPr/>
+      </p:sp>
+      <p:sp>
+        <p:nvSpPr>
+          <p:cNvPr id="3" name="Notes Placeholder 2"/>
+          <p:cNvSpPr>
+            <a:spLocks noGrp="1"/>
+          </p:cNvSpPr>
+          <p:nvPr>
+            <p:ph type="body" idx="1"/>
+          </p:nvPr>
+        </p:nvSpPr>
+        <p:spPr/>
+        <p:txBody>
+          <a:bodyPr/>
+          <a:lstStyle/>
+          <a:p>
+            <a:r>
+              <a:rPr lang="en-US" dirty="0"/>
+              <a:t/>
+            </a:r>
+            <a:endParaRPr lang="en-US" dirty="0"/>
+          </a:p>
+        </p:txBody>
+      </p:sp>
+      <p:sp>
+        <p:nvSpPr>
+          <p:cNvPr id="4" name="Slide Number Placeholder 3"/>
+          <p:cNvSpPr>
+            <a:spLocks noGrp="1"/>
+          </p:cNvSpPr>
+          <p:nvPr>
+            <p:ph type="sldNum" sz="quarter" idx="10"/>
+          </p:nvPr>
+        </p:nvSpPr>
+        <p:spPr/>
+        <p:txBody>
+          <a:bodyPr/>
+          <a:lstStyle/>
+          <a:p>
+            <a:fld id="{F7021451-1387-4CA6-816F-3879F97B5CBC}" type="slidenum">
+              <a:rPr lang="en-US"/>
+              <a:t>14</a:t>
             </a:fld>
             <a:endParaRPr lang="en-US"/>
           </a:p>
@@ -1965,148 +2232,6 @@
         </p:nvSpPr>
         <p:spPr>
           <a:xfrm>
-            <a:off x="406301" y="1223963"/>
-            <a:ext cx="8498026" cy="274290"/>
-          </a:xfrm>
-          <a:prstGeom prst="rect">
-            <a:avLst/>
-          </a:prstGeom>
-          <a:noFill/>
-          <a:ln/>
-        </p:spPr>
-        <p:txBody>
-          <a:bodyPr wrap="square" lIns="0" tIns="0" rIns="0" bIns="0" rtlCol="0" anchor="t"/>
-          <a:lstStyle/>
-          <a:p>
-            <a:pPr algn="l" indent="0" marL="0">
-              <a:lnSpc>
-                <a:spcPts val="2160"/>
-              </a:lnSpc>
-              <a:spcBef>
-                <a:spcPts val="600"/>
-              </a:spcBef>
-              <a:spcAft>
-                <a:spcPts val="800"/>
-              </a:spcAft>
-              <a:buNone/>
-            </a:pPr>
-            <a:r>
-              <a:rPr lang="en-US" sz="1800" b="1" dirty="0">
-                <a:solidFill>
-                  <a:srgbClr val="E07A5F"/>
-                </a:solidFill>
-                <a:latin typeface="Georgia" pitchFamily="34" charset="0"/>
-                <a:ea typeface="Georgia" pitchFamily="34" charset="-122"/>
-                <a:cs typeface="Georgia" pitchFamily="34" charset="-120"/>
-              </a:rPr>
-              <a:t>Goal</a:t>
-            </a:r>
-            <a:endParaRPr lang="en-US" sz="1800" dirty="0"/>
-          </a:p>
-        </p:txBody>
-      </p:sp>
-      <p:sp>
-        <p:nvSpPr>
-          <p:cNvPr id="6" name="Text 4"/>
-          <p:cNvSpPr/>
-          <p:nvPr/>
-        </p:nvSpPr>
-        <p:spPr>
-          <a:xfrm>
-            <a:off x="406301" y="1637854"/>
-            <a:ext cx="8498026" cy="426541"/>
-          </a:xfrm>
-          <a:prstGeom prst="rect">
-            <a:avLst/>
-          </a:prstGeom>
-          <a:noFill/>
-          <a:ln/>
-        </p:spPr>
-        <p:txBody>
-          <a:bodyPr wrap="square" lIns="0" tIns="0" rIns="0" bIns="0" rtlCol="0" anchor="t"/>
-          <a:lstStyle/>
-          <a:p>
-            <a:pPr algn="l" indent="0" marL="0">
-              <a:lnSpc>
-                <a:spcPts val="1680"/>
-              </a:lnSpc>
-              <a:spcBef>
-                <a:spcPts val="300"/>
-              </a:spcBef>
-              <a:spcAft>
-                <a:spcPts val="300"/>
-              </a:spcAft>
-              <a:buNone/>
-            </a:pPr>
-            <a:r>
-              <a:rPr lang="en-US" sz="1200" dirty="0">
-                <a:solidFill>
-                  <a:srgbClr val="2C2C2C"/>
-                </a:solidFill>
-                <a:latin typeface="Verdana" pitchFamily="34" charset="0"/>
-                <a:ea typeface="Verdana" pitchFamily="34" charset="-122"/>
-                <a:cs typeface="Verdana" pitchFamily="34" charset="-120"/>
-              </a:rPr>
-              <a:t>Children see a demonstration of the dot method (</a:t>
-            </a:r>
-            <a:pPr algn="l" indent="0" marL="0">
-              <a:lnSpc>
-                <a:spcPts val="1680"/>
-              </a:lnSpc>
-              <a:spcBef>
-                <a:spcPts val="300"/>
-              </a:spcBef>
-              <a:spcAft>
-                <a:spcPts val="300"/>
-              </a:spcAft>
-              <a:buNone/>
-            </a:pPr>
-            <a:r>
-              <a:rPr lang="en-US" sz="1200" i="1" dirty="0">
-                <a:solidFill>
-                  <a:srgbClr val="2C2C2C"/>
-                </a:solidFill>
-                <a:latin typeface="Verdana" pitchFamily="34" charset="0"/>
-                <a:ea typeface="Verdana" pitchFamily="34" charset="-122"/>
-                <a:cs typeface="Verdana" pitchFamily="34" charset="-120"/>
-              </a:rPr>
-              <a:t>Bindu Paddhati</a:t>
-            </a:r>
-            <a:pPr algn="l" indent="0" marL="0">
-              <a:lnSpc>
-                <a:spcPts val="1680"/>
-              </a:lnSpc>
-              <a:spcBef>
-                <a:spcPts val="300"/>
-              </a:spcBef>
-              <a:spcAft>
-                <a:spcPts val="300"/>
-              </a:spcAft>
-              <a:buNone/>
-            </a:pPr>
-            <a:r>
-              <a:rPr lang="en-US" sz="1200" dirty="0">
-                <a:solidFill>
-                  <a:srgbClr val="2C2C2C"/>
-                </a:solidFill>
-                <a:latin typeface="Verdana" pitchFamily="34" charset="0"/>
-                <a:ea typeface="Verdana" pitchFamily="34" charset="-122"/>
-                <a:cs typeface="Verdana" pitchFamily="34" charset="-120"/>
-              </a:rPr>
-              <a:t>) — the technique they'll learn fully in Grade 6+.</a:t>
-            </a:r>
-            <a:endParaRPr lang="en-US" sz="1200" dirty="0"/>
-          </a:p>
-        </p:txBody>
-      </p:sp>
-      <p:sp>
-        <p:nvSpPr>
-          <p:cNvPr id="7" name="Text 5"/>
-          <p:cNvSpPr/>
-          <p:nvPr/>
-        </p:nvSpPr>
-        <p:spPr>
-          <a:xfrm>
             <a:off x="406301" y="4434929"/>
             <a:ext cx="8498026" cy="213271"/>
           </a:xfrm>
@@ -2251,7 +2376,7 @@
                 <a:ea typeface="Georgia" pitchFamily="34" charset="-122"/>
                 <a:cs typeface="Georgia" pitchFamily="34" charset="-120"/>
               </a:rPr>
-              <a:t>Differentiation</a:t>
+              <a:t>Awe + connect (8 min)</a:t>
             </a:r>
             <a:endParaRPr lang="en-US" sz="1800" dirty="0"/>
           </a:p>
@@ -2266,7 +2391,7 @@
         <p:spPr>
           <a:xfrm>
             <a:off x="634901" y="883593"/>
-            <a:ext cx="8102798" cy="525661"/>
+            <a:ext cx="8102798" cy="487561"/>
           </a:xfrm>
           <a:prstGeom prst="rect">
             <a:avLst/>
@@ -2289,7 +2414,7 @@
               <a:buChar char="•"/>
             </a:pPr>
             <a:r>
-              <a:rPr lang="en-US" sz="1200" b="1" dirty="0">
+              <a:rPr lang="en-US" sz="1200" i="1" dirty="0">
                 <a:solidFill>
                   <a:srgbClr val="2C2C2C"/>
                 </a:solidFill>
@@ -2297,16 +2422,42 @@
                 <a:ea typeface="Verdana" pitchFamily="34" charset="-122"/>
                 <a:cs typeface="Verdana" pitchFamily="34" charset="-120"/>
               </a:rPr>
-              <a:t>Tier up:</a:t>
-            </a:r>
-            <a:pPr algn="l" indent="0" marL="0">
+              <a:t>"You already know the trick of finding 10-pairs. That's the BIG SKILL behind this magic. When you're in Grade 6, you'll learn the dot method too. For now, keep practising those 10-pairs."</a:t>
+            </a:r>
+            <a:endParaRPr lang="en-US" sz="1200" dirty="0"/>
+          </a:p>
+        </p:txBody>
+      </p:sp>
+      <p:sp>
+        <p:nvSpPr>
+          <p:cNvPr id="5" name="Text 3"/>
+          <p:cNvSpPr/>
+          <p:nvPr/>
+        </p:nvSpPr>
+        <p:spPr>
+          <a:xfrm>
+            <a:off x="634901" y="1472654"/>
+            <a:ext cx="8102798" cy="281880"/>
+          </a:xfrm>
+          <a:prstGeom prst="rect">
+            <a:avLst/>
+          </a:prstGeom>
+          <a:noFill/>
+          <a:ln/>
+        </p:spPr>
+        <p:txBody>
+          <a:bodyPr wrap="square" lIns="0" tIns="0" rIns="0" bIns="0" rtlCol="0" anchor="t"/>
+          <a:lstStyle/>
+          <a:p>
+            <a:pPr algn="l" marL="342900" indent="-342900">
               <a:lnSpc>
                 <a:spcPts val="1620"/>
               </a:lnSpc>
               <a:spcAft>
                 <a:spcPts val="300"/>
               </a:spcAft>
-              <a:buNone/>
+              <a:buSzPct val="100000"/>
+              <a:buChar char="•"/>
             </a:pPr>
             <a:r>
               <a:rPr lang="en-US" sz="1200" dirty="0">
@@ -2317,59 +2468,15 @@
                 <a:ea typeface="Verdana" pitchFamily="34" charset="-122"/>
                 <a:cs typeface="Verdana" pitchFamily="34" charset="-120"/>
               </a:rPr>
-              <a:t> Grade 5 fast learners can try one small column problem (4 single digits) with the dot method.</a:t>
+              <a:t>Class chorus of all 5 pairs.</a:t>
             </a:r>
             <a:endParaRPr lang="en-US" sz="1200" dirty="0"/>
           </a:p>
-          <a:p>
-            <a:pPr algn="l" marL="342900" indent="-342900">
-              <a:lnSpc>
-                <a:spcPts val="1620"/>
-              </a:lnSpc>
-              <a:spcAft>
-                <a:spcPts val="300"/>
-              </a:spcAft>
-              <a:buSzPct val="100000"/>
-              <a:buChar char="•"/>
-            </a:pPr>
-            <a:r>
-              <a:rPr lang="en-US" sz="1200" b="1" dirty="0">
-                <a:solidFill>
-                  <a:srgbClr val="2C2C2C"/>
-                </a:solidFill>
-                <a:latin typeface="Verdana" pitchFamily="34" charset="0"/>
-                <a:ea typeface="Verdana" pitchFamily="34" charset="-122"/>
-                <a:cs typeface="Verdana" pitchFamily="34" charset="-120"/>
-              </a:rPr>
-              <a:t>Tier down:</a:t>
-            </a:r>
-            <a:pPr algn="l" indent="0" marL="0">
-              <a:lnSpc>
-                <a:spcPts val="1620"/>
-              </a:lnSpc>
-              <a:spcAft>
-                <a:spcPts val="300"/>
-              </a:spcAft>
-              <a:buNone/>
-            </a:pPr>
-            <a:r>
-              <a:rPr lang="en-US" sz="1200" dirty="0">
-                <a:solidFill>
-                  <a:srgbClr val="2C2C2C"/>
-                </a:solidFill>
-                <a:latin typeface="Verdana" pitchFamily="34" charset="0"/>
-                <a:ea typeface="Verdana" pitchFamily="34" charset="-122"/>
-                <a:cs typeface="Verdana" pitchFamily="34" charset="-120"/>
-              </a:rPr>
-              <a:t> Just watch the demo. Today is awe-day, not practice-day.</a:t>
-            </a:r>
-            <a:endParaRPr lang="en-US" sz="1200" dirty="0"/>
-          </a:p>
-        </p:txBody>
-      </p:sp>
-      <p:sp>
-        <p:nvSpPr>
-          <p:cNvPr id="5" name="Text 3"/>
+        </p:txBody>
+      </p:sp>
+      <p:sp>
+        <p:nvSpPr>
+          <p:cNvPr id="6" name="Text 4"/>
           <p:cNvSpPr/>
           <p:nvPr/>
         </p:nvSpPr>
@@ -2519,7 +2626,7 @@
                 <a:ea typeface="Georgia" pitchFamily="34" charset="-122"/>
                 <a:cs typeface="Georgia" pitchFamily="34" charset="-120"/>
               </a:rPr>
-              <a:t>Teacher's quick notes</a:t>
+              <a:t>Show + chant (2 min)</a:t>
             </a:r>
             <a:endParaRPr lang="en-US" sz="1800" dirty="0"/>
           </a:p>
@@ -2534,7 +2641,7 @@
         <p:spPr>
           <a:xfrm>
             <a:off x="406301" y="870942"/>
-            <a:ext cx="8498026" cy="426541"/>
+            <a:ext cx="8498026" cy="213271"/>
           </a:xfrm>
           <a:prstGeom prst="rect">
             <a:avLst/>
@@ -2567,7 +2674,707 @@
                 <a:ea typeface="Verdana" pitchFamily="34" charset="-122"/>
                 <a:cs typeface="Verdana" pitchFamily="34" charset="-120"/>
               </a:rPr>
-              <a:t>– The "magic" is the point. Don't over-explain. Let it be mysterious. – Don't push for understanding — just curiosity.</a:t>
+              <a:t>Close.</a:t>
+            </a:r>
+            <a:endParaRPr lang="en-US" sz="1200" dirty="0"/>
+          </a:p>
+        </p:txBody>
+      </p:sp>
+      <p:sp>
+        <p:nvSpPr>
+          <p:cNvPr id="5" name="Text 3"/>
+          <p:cNvSpPr/>
+          <p:nvPr/>
+        </p:nvSpPr>
+        <p:spPr>
+          <a:xfrm>
+            <a:off x="406301" y="4434929"/>
+            <a:ext cx="8498026" cy="213271"/>
+          </a:xfrm>
+          <a:prstGeom prst="rect">
+            <a:avLst/>
+          </a:prstGeom>
+          <a:noFill/>
+          <a:ln/>
+        </p:spPr>
+        <p:txBody>
+          <a:bodyPr wrap="square" lIns="0" tIns="0" rIns="0" bIns="0" rtlCol="0" anchor="t"/>
+          <a:lstStyle/>
+          <a:p>
+            <a:pPr algn="l" indent="0" marL="0">
+              <a:lnSpc>
+                <a:spcPts val="1680"/>
+              </a:lnSpc>
+              <a:spcBef>
+                <a:spcPts val="300"/>
+              </a:spcBef>
+              <a:spcAft>
+                <a:spcPts val="300"/>
+              </a:spcAft>
+              <a:buNone/>
+            </a:pPr>
+            <a:r>
+              <a:rPr lang="en-US" sz="1200" dirty="0">
+                <a:solidFill>
+                  <a:srgbClr val="2C2C2C"/>
+                </a:solidFill>
+                <a:latin typeface="Verdana" pitchFamily="34" charset="0"/>
+                <a:ea typeface="Verdana" pitchFamily="34" charset="-122"/>
+                <a:cs typeface="Verdana" pitchFamily="34" charset="-120"/>
+              </a:rPr>
+              <a:t>Primary ·  · IKS Curriculum</a:t>
+            </a:r>
+            <a:endParaRPr lang="en-US" sz="1200" dirty="0"/>
+          </a:p>
+        </p:txBody>
+      </p:sp>
+    </p:spTree>
+  </p:cSld>
+  <p:clrMapOvr>
+    <a:masterClrMapping/>
+  </p:clrMapOvr>
+</p:sld>
+</file>
+
+<file path=ppt/slides/slide12.xml><?xml version="1.0" encoding="utf-8"?>
+<p:sld xmlns:a="http://schemas.openxmlformats.org/drawingml/2006/main" xmlns:r="http://schemas.openxmlformats.org/officeDocument/2006/relationships" xmlns:p="http://schemas.openxmlformats.org/presentationml/2006/main">
+  <p:cSld name="Slide 12">
+    <p:bg>
+      <p:bgPr>
+        <a:solidFill>
+          <a:srgbClr val="FAF7F2"/>
+        </a:solidFill>
+      </p:bgPr>
+    </p:bg>
+    <p:spTree>
+      <p:nvGrpSpPr>
+        <p:cNvPr id="1" name=""/>
+        <p:cNvGrpSpPr/>
+        <p:nvPr/>
+      </p:nvGrpSpPr>
+      <p:grpSpPr>
+        <a:xfrm>
+          <a:off x="0" y="0"/>
+          <a:ext cx="0" cy="0"/>
+          <a:chOff x="0" y="0"/>
+          <a:chExt cx="0" cy="0"/>
+        </a:xfrm>
+      </p:grpSpPr>
+      <p:sp>
+        <p:nvSpPr>
+          <p:cNvPr id="2" name="Text 0"/>
+          <p:cNvSpPr/>
+          <p:nvPr/>
+        </p:nvSpPr>
+        <p:spPr>
+          <a:xfrm>
+            <a:off x="0" y="0"/>
+            <a:ext cx="9144000" cy="101501"/>
+          </a:xfrm>
+          <a:prstGeom prst="rect">
+            <a:avLst/>
+          </a:prstGeom>
+          <a:solidFill>
+            <a:srgbClr val="87A96B"/>
+          </a:solidFill>
+          <a:ln/>
+        </p:spPr>
+        <p:txBody>
+          <a:bodyPr wrap="square" rtlCol="0" anchor="ctr"/>
+          <a:lstStyle/>
+          <a:p>
+            <a:pPr indent="0" marL="0">
+              <a:buNone/>
+            </a:pPr>
+            <a:endParaRPr lang="en-US" dirty="0"/>
+          </a:p>
+        </p:txBody>
+      </p:sp>
+      <p:sp>
+        <p:nvSpPr>
+          <p:cNvPr id="3" name="Text 1"/>
+          <p:cNvSpPr/>
+          <p:nvPr/>
+        </p:nvSpPr>
+        <p:spPr>
+          <a:xfrm>
+            <a:off x="406301" y="457051"/>
+            <a:ext cx="8498026" cy="274290"/>
+          </a:xfrm>
+          <a:prstGeom prst="rect">
+            <a:avLst/>
+          </a:prstGeom>
+          <a:noFill/>
+          <a:ln/>
+        </p:spPr>
+        <p:txBody>
+          <a:bodyPr wrap="square" lIns="0" tIns="0" rIns="0" bIns="0" rtlCol="0" anchor="t"/>
+          <a:lstStyle/>
+          <a:p>
+            <a:pPr algn="l" indent="0" marL="0">
+              <a:lnSpc>
+                <a:spcPts val="2160"/>
+              </a:lnSpc>
+              <a:spcBef>
+                <a:spcPts val="600"/>
+              </a:spcBef>
+              <a:spcAft>
+                <a:spcPts val="800"/>
+              </a:spcAft>
+              <a:buNone/>
+            </a:pPr>
+            <a:r>
+              <a:rPr lang="en-US" sz="1800" b="1" dirty="0">
+                <a:solidFill>
+                  <a:srgbClr val="E07A5F"/>
+                </a:solidFill>
+                <a:latin typeface="Georgia" pitchFamily="34" charset="0"/>
+                <a:ea typeface="Georgia" pitchFamily="34" charset="-122"/>
+                <a:cs typeface="Georgia" pitchFamily="34" charset="-120"/>
+              </a:rPr>
+              <a:t>Homework</a:t>
+            </a:r>
+            <a:endParaRPr lang="en-US" sz="1800" dirty="0"/>
+          </a:p>
+        </p:txBody>
+      </p:sp>
+      <p:sp>
+        <p:nvSpPr>
+          <p:cNvPr id="4" name="Text 2"/>
+          <p:cNvSpPr/>
+          <p:nvPr/>
+        </p:nvSpPr>
+        <p:spPr>
+          <a:xfrm>
+            <a:off x="634901" y="883593"/>
+            <a:ext cx="8102798" cy="281880"/>
+          </a:xfrm>
+          <a:prstGeom prst="rect">
+            <a:avLst/>
+          </a:prstGeom>
+          <a:noFill/>
+          <a:ln/>
+        </p:spPr>
+        <p:txBody>
+          <a:bodyPr wrap="square" lIns="0" tIns="0" rIns="0" bIns="0" rtlCol="0" anchor="t"/>
+          <a:lstStyle/>
+          <a:p>
+            <a:pPr algn="l" marL="342900" indent="-342900">
+              <a:lnSpc>
+                <a:spcPts val="1620"/>
+              </a:lnSpc>
+              <a:spcAft>
+                <a:spcPts val="300"/>
+              </a:spcAft>
+              <a:buSzPct val="100000"/>
+              <a:buChar char="•"/>
+            </a:pPr>
+            <a:r>
+              <a:rPr lang="en-US" sz="1200" dirty="0">
+                <a:solidFill>
+                  <a:srgbClr val="2C2C2C"/>
+                </a:solidFill>
+                <a:latin typeface="Verdana" pitchFamily="34" charset="0"/>
+                <a:ea typeface="Verdana" pitchFamily="34" charset="-122"/>
+                <a:cs typeface="Verdana" pitchFamily="34" charset="-120"/>
+              </a:rPr>
+              <a:t>Teach the chant to a younger child at home. They'll be ready when they're older.</a:t>
+            </a:r>
+            <a:endParaRPr lang="en-US" sz="1200" dirty="0"/>
+          </a:p>
+        </p:txBody>
+      </p:sp>
+      <p:sp>
+        <p:nvSpPr>
+          <p:cNvPr id="5" name="Text 3"/>
+          <p:cNvSpPr/>
+          <p:nvPr/>
+        </p:nvSpPr>
+        <p:spPr>
+          <a:xfrm>
+            <a:off x="406301" y="4434929"/>
+            <a:ext cx="8498026" cy="213271"/>
+          </a:xfrm>
+          <a:prstGeom prst="rect">
+            <a:avLst/>
+          </a:prstGeom>
+          <a:noFill/>
+          <a:ln/>
+        </p:spPr>
+        <p:txBody>
+          <a:bodyPr wrap="square" lIns="0" tIns="0" rIns="0" bIns="0" rtlCol="0" anchor="t"/>
+          <a:lstStyle/>
+          <a:p>
+            <a:pPr algn="l" indent="0" marL="0">
+              <a:lnSpc>
+                <a:spcPts val="1680"/>
+              </a:lnSpc>
+              <a:spcBef>
+                <a:spcPts val="300"/>
+              </a:spcBef>
+              <a:spcAft>
+                <a:spcPts val="300"/>
+              </a:spcAft>
+              <a:buNone/>
+            </a:pPr>
+            <a:r>
+              <a:rPr lang="en-US" sz="1200" dirty="0">
+                <a:solidFill>
+                  <a:srgbClr val="2C2C2C"/>
+                </a:solidFill>
+                <a:latin typeface="Verdana" pitchFamily="34" charset="0"/>
+                <a:ea typeface="Verdana" pitchFamily="34" charset="-122"/>
+                <a:cs typeface="Verdana" pitchFamily="34" charset="-120"/>
+              </a:rPr>
+              <a:t>Primary ·  · IKS Curriculum</a:t>
+            </a:r>
+            <a:endParaRPr lang="en-US" sz="1200" dirty="0"/>
+          </a:p>
+        </p:txBody>
+      </p:sp>
+    </p:spTree>
+  </p:cSld>
+  <p:clrMapOvr>
+    <a:masterClrMapping/>
+  </p:clrMapOvr>
+</p:sld>
+</file>
+
+<file path=ppt/slides/slide13.xml><?xml version="1.0" encoding="utf-8"?>
+<p:sld xmlns:a="http://schemas.openxmlformats.org/drawingml/2006/main" xmlns:r="http://schemas.openxmlformats.org/officeDocument/2006/relationships" xmlns:p="http://schemas.openxmlformats.org/presentationml/2006/main">
+  <p:cSld name="Slide 13">
+    <p:bg>
+      <p:bgPr>
+        <a:solidFill>
+          <a:srgbClr val="FAF7F2"/>
+        </a:solidFill>
+      </p:bgPr>
+    </p:bg>
+    <p:spTree>
+      <p:nvGrpSpPr>
+        <p:cNvPr id="1" name=""/>
+        <p:cNvGrpSpPr/>
+        <p:nvPr/>
+      </p:nvGrpSpPr>
+      <p:grpSpPr>
+        <a:xfrm>
+          <a:off x="0" y="0"/>
+          <a:ext cx="0" cy="0"/>
+          <a:chOff x="0" y="0"/>
+          <a:chExt cx="0" cy="0"/>
+        </a:xfrm>
+      </p:grpSpPr>
+      <p:sp>
+        <p:nvSpPr>
+          <p:cNvPr id="2" name="Text 0"/>
+          <p:cNvSpPr/>
+          <p:nvPr/>
+        </p:nvSpPr>
+        <p:spPr>
+          <a:xfrm>
+            <a:off x="0" y="0"/>
+            <a:ext cx="9144000" cy="101501"/>
+          </a:xfrm>
+          <a:prstGeom prst="rect">
+            <a:avLst/>
+          </a:prstGeom>
+          <a:solidFill>
+            <a:srgbClr val="87A96B"/>
+          </a:solidFill>
+          <a:ln/>
+        </p:spPr>
+        <p:txBody>
+          <a:bodyPr wrap="square" rtlCol="0" anchor="ctr"/>
+          <a:lstStyle/>
+          <a:p>
+            <a:pPr indent="0" marL="0">
+              <a:buNone/>
+            </a:pPr>
+            <a:endParaRPr lang="en-US" dirty="0"/>
+          </a:p>
+        </p:txBody>
+      </p:sp>
+      <p:sp>
+        <p:nvSpPr>
+          <p:cNvPr id="3" name="Text 1"/>
+          <p:cNvSpPr/>
+          <p:nvPr/>
+        </p:nvSpPr>
+        <p:spPr>
+          <a:xfrm>
+            <a:off x="406301" y="457051"/>
+            <a:ext cx="8498026" cy="274290"/>
+          </a:xfrm>
+          <a:prstGeom prst="rect">
+            <a:avLst/>
+          </a:prstGeom>
+          <a:noFill/>
+          <a:ln/>
+        </p:spPr>
+        <p:txBody>
+          <a:bodyPr wrap="square" lIns="0" tIns="0" rIns="0" bIns="0" rtlCol="0" anchor="t"/>
+          <a:lstStyle/>
+          <a:p>
+            <a:pPr algn="l" indent="0" marL="0">
+              <a:lnSpc>
+                <a:spcPts val="2160"/>
+              </a:lnSpc>
+              <a:spcBef>
+                <a:spcPts val="600"/>
+              </a:spcBef>
+              <a:spcAft>
+                <a:spcPts val="800"/>
+              </a:spcAft>
+              <a:buNone/>
+            </a:pPr>
+            <a:r>
+              <a:rPr lang="en-US" sz="1800" b="1" dirty="0">
+                <a:solidFill>
+                  <a:srgbClr val="E07A5F"/>
+                </a:solidFill>
+                <a:latin typeface="Georgia" pitchFamily="34" charset="0"/>
+                <a:ea typeface="Georgia" pitchFamily="34" charset="-122"/>
+                <a:cs typeface="Georgia" pitchFamily="34" charset="-120"/>
+              </a:rPr>
+              <a:t>Differentiation</a:t>
+            </a:r>
+            <a:endParaRPr lang="en-US" sz="1800" dirty="0"/>
+          </a:p>
+        </p:txBody>
+      </p:sp>
+      <p:sp>
+        <p:nvSpPr>
+          <p:cNvPr id="4" name="Text 2"/>
+          <p:cNvSpPr/>
+          <p:nvPr/>
+        </p:nvSpPr>
+        <p:spPr>
+          <a:xfrm>
+            <a:off x="634901" y="883593"/>
+            <a:ext cx="8102798" cy="525661"/>
+          </a:xfrm>
+          <a:prstGeom prst="rect">
+            <a:avLst/>
+          </a:prstGeom>
+          <a:noFill/>
+          <a:ln/>
+        </p:spPr>
+        <p:txBody>
+          <a:bodyPr wrap="square" lIns="0" tIns="0" rIns="0" bIns="0" rtlCol="0" anchor="t"/>
+          <a:lstStyle/>
+          <a:p>
+            <a:pPr algn="l" marL="342900" indent="-342900">
+              <a:lnSpc>
+                <a:spcPts val="1620"/>
+              </a:lnSpc>
+              <a:spcAft>
+                <a:spcPts val="300"/>
+              </a:spcAft>
+              <a:buSzPct val="100000"/>
+              <a:buChar char="•"/>
+            </a:pPr>
+            <a:r>
+              <a:rPr lang="en-US" sz="1200" b="1" dirty="0">
+                <a:solidFill>
+                  <a:srgbClr val="2C2C2C"/>
+                </a:solidFill>
+                <a:latin typeface="Verdana" pitchFamily="34" charset="0"/>
+                <a:ea typeface="Verdana" pitchFamily="34" charset="-122"/>
+                <a:cs typeface="Verdana" pitchFamily="34" charset="-120"/>
+              </a:rPr>
+              <a:t>Tier up:</a:t>
+            </a:r>
+            <a:pPr algn="l" indent="0" marL="0">
+              <a:lnSpc>
+                <a:spcPts val="1620"/>
+              </a:lnSpc>
+              <a:spcAft>
+                <a:spcPts val="300"/>
+              </a:spcAft>
+              <a:buNone/>
+            </a:pPr>
+            <a:r>
+              <a:rPr lang="en-US" sz="1200" dirty="0">
+                <a:solidFill>
+                  <a:srgbClr val="2C2C2C"/>
+                </a:solidFill>
+                <a:latin typeface="Verdana" pitchFamily="34" charset="0"/>
+                <a:ea typeface="Verdana" pitchFamily="34" charset="-122"/>
+                <a:cs typeface="Verdana" pitchFamily="34" charset="-120"/>
+              </a:rPr>
+              <a:t> Grade 5 fast learners can try one small column problem (4 single digits) with the dot method.</a:t>
+            </a:r>
+            <a:endParaRPr lang="en-US" sz="1200" dirty="0"/>
+          </a:p>
+          <a:p>
+            <a:pPr algn="l" marL="342900" indent="-342900">
+              <a:lnSpc>
+                <a:spcPts val="1620"/>
+              </a:lnSpc>
+              <a:spcAft>
+                <a:spcPts val="300"/>
+              </a:spcAft>
+              <a:buSzPct val="100000"/>
+              <a:buChar char="•"/>
+            </a:pPr>
+            <a:r>
+              <a:rPr lang="en-US" sz="1200" b="1" dirty="0">
+                <a:solidFill>
+                  <a:srgbClr val="2C2C2C"/>
+                </a:solidFill>
+                <a:latin typeface="Verdana" pitchFamily="34" charset="0"/>
+                <a:ea typeface="Verdana" pitchFamily="34" charset="-122"/>
+                <a:cs typeface="Verdana" pitchFamily="34" charset="-120"/>
+              </a:rPr>
+              <a:t>Tier down:</a:t>
+            </a:r>
+            <a:pPr algn="l" indent="0" marL="0">
+              <a:lnSpc>
+                <a:spcPts val="1620"/>
+              </a:lnSpc>
+              <a:spcAft>
+                <a:spcPts val="300"/>
+              </a:spcAft>
+              <a:buNone/>
+            </a:pPr>
+            <a:r>
+              <a:rPr lang="en-US" sz="1200" dirty="0">
+                <a:solidFill>
+                  <a:srgbClr val="2C2C2C"/>
+                </a:solidFill>
+                <a:latin typeface="Verdana" pitchFamily="34" charset="0"/>
+                <a:ea typeface="Verdana" pitchFamily="34" charset="-122"/>
+                <a:cs typeface="Verdana" pitchFamily="34" charset="-120"/>
+              </a:rPr>
+              <a:t> Just watch the demo. Today is awe-day, not practice-day.</a:t>
+            </a:r>
+            <a:endParaRPr lang="en-US" sz="1200" dirty="0"/>
+          </a:p>
+        </p:txBody>
+      </p:sp>
+      <p:sp>
+        <p:nvSpPr>
+          <p:cNvPr id="5" name="Text 3"/>
+          <p:cNvSpPr/>
+          <p:nvPr/>
+        </p:nvSpPr>
+        <p:spPr>
+          <a:xfrm>
+            <a:off x="406301" y="4434929"/>
+            <a:ext cx="8498026" cy="213271"/>
+          </a:xfrm>
+          <a:prstGeom prst="rect">
+            <a:avLst/>
+          </a:prstGeom>
+          <a:noFill/>
+          <a:ln/>
+        </p:spPr>
+        <p:txBody>
+          <a:bodyPr wrap="square" lIns="0" tIns="0" rIns="0" bIns="0" rtlCol="0" anchor="t"/>
+          <a:lstStyle/>
+          <a:p>
+            <a:pPr algn="l" indent="0" marL="0">
+              <a:lnSpc>
+                <a:spcPts val="1680"/>
+              </a:lnSpc>
+              <a:spcBef>
+                <a:spcPts val="300"/>
+              </a:spcBef>
+              <a:spcAft>
+                <a:spcPts val="300"/>
+              </a:spcAft>
+              <a:buNone/>
+            </a:pPr>
+            <a:r>
+              <a:rPr lang="en-US" sz="1200" dirty="0">
+                <a:solidFill>
+                  <a:srgbClr val="2C2C2C"/>
+                </a:solidFill>
+                <a:latin typeface="Verdana" pitchFamily="34" charset="0"/>
+                <a:ea typeface="Verdana" pitchFamily="34" charset="-122"/>
+                <a:cs typeface="Verdana" pitchFamily="34" charset="-120"/>
+              </a:rPr>
+              <a:t>Primary ·  · IKS Curriculum</a:t>
+            </a:r>
+            <a:endParaRPr lang="en-US" sz="1200" dirty="0"/>
+          </a:p>
+        </p:txBody>
+      </p:sp>
+    </p:spTree>
+  </p:cSld>
+  <p:clrMapOvr>
+    <a:masterClrMapping/>
+  </p:clrMapOvr>
+</p:sld>
+</file>
+
+<file path=ppt/slides/slide14.xml><?xml version="1.0" encoding="utf-8"?>
+<p:sld xmlns:a="http://schemas.openxmlformats.org/drawingml/2006/main" xmlns:r="http://schemas.openxmlformats.org/officeDocument/2006/relationships" xmlns:p="http://schemas.openxmlformats.org/presentationml/2006/main">
+  <p:cSld name="Slide 14">
+    <p:bg>
+      <p:bgPr>
+        <a:solidFill>
+          <a:srgbClr val="FAF7F2"/>
+        </a:solidFill>
+      </p:bgPr>
+    </p:bg>
+    <p:spTree>
+      <p:nvGrpSpPr>
+        <p:cNvPr id="1" name=""/>
+        <p:cNvGrpSpPr/>
+        <p:nvPr/>
+      </p:nvGrpSpPr>
+      <p:grpSpPr>
+        <a:xfrm>
+          <a:off x="0" y="0"/>
+          <a:ext cx="0" cy="0"/>
+          <a:chOff x="0" y="0"/>
+          <a:chExt cx="0" cy="0"/>
+        </a:xfrm>
+      </p:grpSpPr>
+      <p:sp>
+        <p:nvSpPr>
+          <p:cNvPr id="2" name="Text 0"/>
+          <p:cNvSpPr/>
+          <p:nvPr/>
+        </p:nvSpPr>
+        <p:spPr>
+          <a:xfrm>
+            <a:off x="0" y="0"/>
+            <a:ext cx="9144000" cy="101501"/>
+          </a:xfrm>
+          <a:prstGeom prst="rect">
+            <a:avLst/>
+          </a:prstGeom>
+          <a:solidFill>
+            <a:srgbClr val="87A96B"/>
+          </a:solidFill>
+          <a:ln/>
+        </p:spPr>
+        <p:txBody>
+          <a:bodyPr wrap="square" rtlCol="0" anchor="ctr"/>
+          <a:lstStyle/>
+          <a:p>
+            <a:pPr indent="0" marL="0">
+              <a:buNone/>
+            </a:pPr>
+            <a:endParaRPr lang="en-US" dirty="0"/>
+          </a:p>
+        </p:txBody>
+      </p:sp>
+      <p:sp>
+        <p:nvSpPr>
+          <p:cNvPr id="3" name="Text 1"/>
+          <p:cNvSpPr/>
+          <p:nvPr/>
+        </p:nvSpPr>
+        <p:spPr>
+          <a:xfrm>
+            <a:off x="406301" y="457051"/>
+            <a:ext cx="8498026" cy="274290"/>
+          </a:xfrm>
+          <a:prstGeom prst="rect">
+            <a:avLst/>
+          </a:prstGeom>
+          <a:noFill/>
+          <a:ln/>
+        </p:spPr>
+        <p:txBody>
+          <a:bodyPr wrap="square" lIns="0" tIns="0" rIns="0" bIns="0" rtlCol="0" anchor="t"/>
+          <a:lstStyle/>
+          <a:p>
+            <a:pPr algn="l" indent="0" marL="0">
+              <a:lnSpc>
+                <a:spcPts val="2160"/>
+              </a:lnSpc>
+              <a:spcBef>
+                <a:spcPts val="600"/>
+              </a:spcBef>
+              <a:spcAft>
+                <a:spcPts val="800"/>
+              </a:spcAft>
+              <a:buNone/>
+            </a:pPr>
+            <a:r>
+              <a:rPr lang="en-US" sz="1800" b="1" dirty="0">
+                <a:solidFill>
+                  <a:srgbClr val="E07A5F"/>
+                </a:solidFill>
+                <a:latin typeface="Georgia" pitchFamily="34" charset="0"/>
+                <a:ea typeface="Georgia" pitchFamily="34" charset="-122"/>
+                <a:cs typeface="Georgia" pitchFamily="34" charset="-120"/>
+              </a:rPr>
+              <a:t>Teacher's quick notes</a:t>
+            </a:r>
+            <a:endParaRPr lang="en-US" sz="1800" dirty="0"/>
+          </a:p>
+        </p:txBody>
+      </p:sp>
+      <p:sp>
+        <p:nvSpPr>
+          <p:cNvPr id="4" name="Text 2"/>
+          <p:cNvSpPr/>
+          <p:nvPr/>
+        </p:nvSpPr>
+        <p:spPr>
+          <a:xfrm>
+            <a:off x="634901" y="883593"/>
+            <a:ext cx="8102798" cy="525661"/>
+          </a:xfrm>
+          <a:prstGeom prst="rect">
+            <a:avLst/>
+          </a:prstGeom>
+          <a:noFill/>
+          <a:ln/>
+        </p:spPr>
+        <p:txBody>
+          <a:bodyPr wrap="square" lIns="0" tIns="0" rIns="0" bIns="0" rtlCol="0" anchor="t"/>
+          <a:lstStyle/>
+          <a:p>
+            <a:pPr algn="l" marL="342900" indent="-342900">
+              <a:lnSpc>
+                <a:spcPts val="1620"/>
+              </a:lnSpc>
+              <a:spcAft>
+                <a:spcPts val="300"/>
+              </a:spcAft>
+              <a:buSzPct val="100000"/>
+              <a:buChar char="•"/>
+            </a:pPr>
+            <a:r>
+              <a:rPr lang="en-US" sz="1200" dirty="0">
+                <a:solidFill>
+                  <a:srgbClr val="2C2C2C"/>
+                </a:solidFill>
+                <a:latin typeface="Verdana" pitchFamily="34" charset="0"/>
+                <a:ea typeface="Verdana" pitchFamily="34" charset="-122"/>
+                <a:cs typeface="Verdana" pitchFamily="34" charset="-120"/>
+              </a:rPr>
+              <a:t>The "magic" is the point. Don't over-explain. Let it be mysterious.</a:t>
+            </a:r>
+            <a:endParaRPr lang="en-US" sz="1200" dirty="0"/>
+          </a:p>
+          <a:p>
+            <a:pPr algn="l" marL="342900" indent="-342900">
+              <a:lnSpc>
+                <a:spcPts val="1620"/>
+              </a:lnSpc>
+              <a:spcAft>
+                <a:spcPts val="300"/>
+              </a:spcAft>
+              <a:buSzPct val="100000"/>
+              <a:buChar char="•"/>
+            </a:pPr>
+            <a:r>
+              <a:rPr lang="en-US" sz="1200" dirty="0">
+                <a:solidFill>
+                  <a:srgbClr val="2C2C2C"/>
+                </a:solidFill>
+                <a:latin typeface="Verdana" pitchFamily="34" charset="0"/>
+                <a:ea typeface="Verdana" pitchFamily="34" charset="-122"/>
+                <a:cs typeface="Verdana" pitchFamily="34" charset="-120"/>
+              </a:rPr>
+              <a:t>Don't push for understanding — just curiosity.</a:t>
             </a:r>
             <a:endParaRPr lang="en-US" sz="1200" dirty="0"/>
           </a:p>
@@ -2725,7 +3532,7 @@
                 <a:ea typeface="Georgia" pitchFamily="34" charset="-122"/>
                 <a:cs typeface="Georgia" pitchFamily="34" charset="-120"/>
               </a:rPr>
-              <a:t>Materials</a:t>
+              <a:t>Goal</a:t>
             </a:r>
             <a:endParaRPr lang="en-US" sz="1800" dirty="0"/>
           </a:p>
@@ -2740,7 +3547,7 @@
         <p:spPr>
           <a:xfrm>
             <a:off x="406301" y="870942"/>
-            <a:ext cx="8498026" cy="213271"/>
+            <a:ext cx="8498026" cy="426541"/>
           </a:xfrm>
           <a:prstGeom prst="rect">
             <a:avLst/>
@@ -2773,7 +3580,53 @@
                 <a:ea typeface="Verdana" pitchFamily="34" charset="-122"/>
                 <a:cs typeface="Verdana" pitchFamily="34" charset="-120"/>
               </a:rPr>
-              <a:t>– Whiteboard, large – A long column problem (4 four-digit numbers)</a:t>
+              <a:t>Children see a demonstration of the dot method (</a:t>
+            </a:r>
+            <a:pPr algn="l" indent="0" marL="0">
+              <a:lnSpc>
+                <a:spcPts val="1680"/>
+              </a:lnSpc>
+              <a:spcBef>
+                <a:spcPts val="300"/>
+              </a:spcBef>
+              <a:spcAft>
+                <a:spcPts val="300"/>
+              </a:spcAft>
+              <a:buNone/>
+            </a:pPr>
+            <a:r>
+              <a:rPr lang="en-US" sz="1200" i="1" dirty="0">
+                <a:solidFill>
+                  <a:srgbClr val="2C2C2C"/>
+                </a:solidFill>
+                <a:latin typeface="Verdana" pitchFamily="34" charset="0"/>
+                <a:ea typeface="Verdana" pitchFamily="34" charset="-122"/>
+                <a:cs typeface="Verdana" pitchFamily="34" charset="-120"/>
+              </a:rPr>
+              <a:t>Bindu Paddhati</a:t>
+            </a:r>
+            <a:pPr algn="l" indent="0" marL="0">
+              <a:lnSpc>
+                <a:spcPts val="1680"/>
+              </a:lnSpc>
+              <a:spcBef>
+                <a:spcPts val="300"/>
+              </a:spcBef>
+              <a:spcAft>
+                <a:spcPts val="300"/>
+              </a:spcAft>
+              <a:buNone/>
+            </a:pPr>
+            <a:r>
+              <a:rPr lang="en-US" sz="1200" dirty="0">
+                <a:solidFill>
+                  <a:srgbClr val="2C2C2C"/>
+                </a:solidFill>
+                <a:latin typeface="Verdana" pitchFamily="34" charset="0"/>
+                <a:ea typeface="Verdana" pitchFamily="34" charset="-122"/>
+                <a:cs typeface="Verdana" pitchFamily="34" charset="-120"/>
+              </a:rPr>
+              <a:t>) — the technique they'll learn fully in Grade 6+.</a:t>
             </a:r>
             <a:endParaRPr lang="en-US" sz="1200" dirty="0"/>
           </a:p>
@@ -2931,7 +3784,7 @@
                 <a:ea typeface="Georgia" pitchFamily="34" charset="-122"/>
                 <a:cs typeface="Georgia" pitchFamily="34" charset="-120"/>
               </a:rPr>
-              <a:t>The flow</a:t>
+              <a:t>Materials</a:t>
             </a:r>
             <a:endParaRPr lang="en-US" sz="1800" dirty="0"/>
           </a:p>
@@ -2940,6 +3793,76 @@
       <p:sp>
         <p:nvSpPr>
           <p:cNvPr id="4" name="Text 2"/>
+          <p:cNvSpPr/>
+          <p:nvPr/>
+        </p:nvSpPr>
+        <p:spPr>
+          <a:xfrm>
+            <a:off x="634901" y="883593"/>
+            <a:ext cx="8102798" cy="525661"/>
+          </a:xfrm>
+          <a:prstGeom prst="rect">
+            <a:avLst/>
+          </a:prstGeom>
+          <a:noFill/>
+          <a:ln/>
+        </p:spPr>
+        <p:txBody>
+          <a:bodyPr wrap="square" lIns="0" tIns="0" rIns="0" bIns="0" rtlCol="0" anchor="t"/>
+          <a:lstStyle/>
+          <a:p>
+            <a:pPr algn="l" marL="342900" indent="-342900">
+              <a:lnSpc>
+                <a:spcPts val="1620"/>
+              </a:lnSpc>
+              <a:spcAft>
+                <a:spcPts val="300"/>
+              </a:spcAft>
+              <a:buSzPct val="100000"/>
+              <a:buChar char="•"/>
+            </a:pPr>
+            <a:r>
+              <a:rPr lang="en-US" sz="1200" dirty="0">
+                <a:solidFill>
+                  <a:srgbClr val="2C2C2C"/>
+                </a:solidFill>
+                <a:latin typeface="Verdana" pitchFamily="34" charset="0"/>
+                <a:ea typeface="Verdana" pitchFamily="34" charset="-122"/>
+                <a:cs typeface="Verdana" pitchFamily="34" charset="-120"/>
+              </a:rPr>
+              <a:t>Whiteboard, large</a:t>
+            </a:r>
+            <a:endParaRPr lang="en-US" sz="1200" dirty="0"/>
+          </a:p>
+          <a:p>
+            <a:pPr algn="l" marL="342900" indent="-342900">
+              <a:lnSpc>
+                <a:spcPts val="1620"/>
+              </a:lnSpc>
+              <a:spcAft>
+                <a:spcPts val="300"/>
+              </a:spcAft>
+              <a:buSzPct val="100000"/>
+              <a:buChar char="•"/>
+            </a:pPr>
+            <a:r>
+              <a:rPr lang="en-US" sz="1200" dirty="0">
+                <a:solidFill>
+                  <a:srgbClr val="2C2C2C"/>
+                </a:solidFill>
+                <a:latin typeface="Verdana" pitchFamily="34" charset="0"/>
+                <a:ea typeface="Verdana" pitchFamily="34" charset="-122"/>
+                <a:cs typeface="Verdana" pitchFamily="34" charset="-120"/>
+              </a:rPr>
+              <a:t>A long column problem (4 four-digit numbers)</a:t>
+            </a:r>
+            <a:endParaRPr lang="en-US" sz="1200" dirty="0"/>
+          </a:p>
+        </p:txBody>
+      </p:sp>
+      <p:sp>
+        <p:nvSpPr>
+          <p:cNvPr id="5" name="Text 3"/>
           <p:cNvSpPr/>
           <p:nvPr/>
         </p:nvSpPr>
@@ -3089,7 +4012,7 @@
                 <a:ea typeface="Georgia" pitchFamily="34" charset="-122"/>
                 <a:cs typeface="Georgia" pitchFamily="34" charset="-120"/>
               </a:rPr>
-              <a:t>Settle + chant (5 min)</a:t>
+              <a:t>The flow</a:t>
             </a:r>
             <a:endParaRPr lang="en-US" sz="1800" dirty="0"/>
           </a:p>
@@ -3247,7 +4170,7 @@
                 <a:ea typeface="Georgia" pitchFamily="34" charset="-122"/>
                 <a:cs typeface="Georgia" pitchFamily="34" charset="-120"/>
               </a:rPr>
-              <a:t>Story (8 min)</a:t>
+              <a:t>Settle + chant (5 min)</a:t>
             </a:r>
             <a:endParaRPr lang="en-US" sz="1800" dirty="0"/>
           </a:p>
@@ -3256,116 +4179,6 @@
       <p:sp>
         <p:nvSpPr>
           <p:cNvPr id="4" name="Text 2"/>
-          <p:cNvSpPr/>
-          <p:nvPr/>
-        </p:nvSpPr>
-        <p:spPr>
-          <a:xfrm>
-            <a:off x="634901" y="883593"/>
-            <a:ext cx="8102798" cy="731341"/>
-          </a:xfrm>
-          <a:prstGeom prst="rect">
-            <a:avLst/>
-          </a:prstGeom>
-          <a:noFill/>
-          <a:ln/>
-        </p:spPr>
-        <p:txBody>
-          <a:bodyPr wrap="square" lIns="0" tIns="0" rIns="0" bIns="0" rtlCol="0" anchor="t"/>
-          <a:lstStyle/>
-          <a:p>
-            <a:pPr algn="l" marL="342900" indent="-342900">
-              <a:lnSpc>
-                <a:spcPts val="1620"/>
-              </a:lnSpc>
-              <a:spcAft>
-                <a:spcPts val="300"/>
-              </a:spcAft>
-              <a:buSzPct val="100000"/>
-              <a:buChar char="•"/>
-            </a:pPr>
-            <a:r>
-              <a:rPr lang="en-US" sz="1200" i="1" dirty="0">
-                <a:solidFill>
-                  <a:srgbClr val="2C2C2C"/>
-                </a:solidFill>
-                <a:latin typeface="Verdana" pitchFamily="34" charset="0"/>
-                <a:ea typeface="Verdana" pitchFamily="34" charset="-122"/>
-                <a:cs typeface="Verdana" pitchFamily="34" charset="-120"/>
-              </a:rPr>
-              <a:t>"Today I'm going to show you a magic trick. Older kids — Grade 6, 7, 8 — learn this. You're going to SEE it today. We won't fully learn it until you're older."</a:t>
-            </a:r>
-            <a:endParaRPr lang="en-US" sz="1200" dirty="0"/>
-          </a:p>
-          <a:p>
-            <a:pPr algn="l" marL="342900" indent="-342900">
-              <a:lnSpc>
-                <a:spcPts val="1620"/>
-              </a:lnSpc>
-              <a:spcAft>
-                <a:spcPts val="300"/>
-              </a:spcAft>
-              <a:buSzPct val="100000"/>
-              <a:buChar char="•"/>
-            </a:pPr>
-            <a:r>
-              <a:rPr lang="en-US" sz="1200" i="1" dirty="0">
-                <a:solidFill>
-                  <a:srgbClr val="2C2C2C"/>
-                </a:solidFill>
-                <a:latin typeface="Verdana" pitchFamily="34" charset="0"/>
-                <a:ea typeface="Verdana" pitchFamily="34" charset="-122"/>
-                <a:cs typeface="Verdana" pitchFamily="34" charset="-120"/>
-              </a:rPr>
-              <a:t>"It's called</a:t>
-            </a:r>
-            <a:pPr algn="l" indent="0" marL="0">
-              <a:lnSpc>
-                <a:spcPts val="1620"/>
-              </a:lnSpc>
-              <a:spcAft>
-                <a:spcPts val="300"/>
-              </a:spcAft>
-              <a:buNone/>
-            </a:pPr>
-            <a:r>
-              <a:rPr lang="en-US" sz="1200" dirty="0">
-                <a:solidFill>
-                  <a:srgbClr val="2C2C2C"/>
-                </a:solidFill>
-                <a:latin typeface="Verdana" pitchFamily="34" charset="0"/>
-                <a:ea typeface="Verdana" pitchFamily="34" charset="-122"/>
-                <a:cs typeface="Verdana" pitchFamily="34" charset="-120"/>
-              </a:rPr>
-              <a:t> Bindu Paddhati </a:t>
-            </a:r>
-            <a:pPr algn="l" indent="0" marL="0">
-              <a:lnSpc>
-                <a:spcPts val="1620"/>
-              </a:lnSpc>
-              <a:spcAft>
-                <a:spcPts val="300"/>
-              </a:spcAft>
-              <a:buNone/>
-            </a:pPr>
-            <a:r>
-              <a:rPr lang="en-US" sz="1200" i="1" dirty="0">
-                <a:solidFill>
-                  <a:srgbClr val="2C2C2C"/>
-                </a:solidFill>
-                <a:latin typeface="Verdana" pitchFamily="34" charset="0"/>
-                <a:ea typeface="Verdana" pitchFamily="34" charset="-122"/>
-                <a:cs typeface="Verdana" pitchFamily="34" charset="-120"/>
-              </a:rPr>
-              <a:t>— that's Sanskrit for 'dot method.'"</a:t>
-            </a:r>
-            <a:endParaRPr lang="en-US" sz="1200" dirty="0"/>
-          </a:p>
-        </p:txBody>
-      </p:sp>
-      <p:sp>
-        <p:nvSpPr>
-          <p:cNvPr id="5" name="Text 3"/>
           <p:cNvSpPr/>
           <p:nvPr/>
         </p:nvSpPr>
@@ -3515,7 +4328,7 @@
                 <a:ea typeface="Georgia" pitchFamily="34" charset="-122"/>
                 <a:cs typeface="Georgia" pitchFamily="34" charset="-120"/>
               </a:rPr>
-              <a:t>Live demo (12 min)</a:t>
+              <a:t>Story (8 min)</a:t>
             </a:r>
             <a:endParaRPr lang="en-US" sz="1800" dirty="0"/>
           </a:p>
@@ -3529,8 +4342,8 @@
         </p:nvSpPr>
         <p:spPr>
           <a:xfrm>
-            <a:off x="406301" y="870942"/>
-            <a:ext cx="8498026" cy="213271"/>
+            <a:off x="634901" y="883593"/>
+            <a:ext cx="8102798" cy="731341"/>
           </a:xfrm>
           <a:prstGeom prst="rect">
             <a:avLst/>
@@ -3542,20 +4355,18 @@
           <a:bodyPr wrap="square" lIns="0" tIns="0" rIns="0" bIns="0" rtlCol="0" anchor="t"/>
           <a:lstStyle/>
           <a:p>
-            <a:pPr algn="l" indent="0" marL="0">
-              <a:lnSpc>
-                <a:spcPts val="1680"/>
-              </a:lnSpc>
-              <a:spcBef>
-                <a:spcPts val="300"/>
-              </a:spcBef>
-              <a:spcAft>
-                <a:spcPts val="300"/>
-              </a:spcAft>
-              <a:buNone/>
-            </a:pPr>
-            <a:r>
-              <a:rPr lang="en-US" sz="1200" dirty="0">
+            <a:pPr algn="l" marL="342900" indent="-342900">
+              <a:lnSpc>
+                <a:spcPts val="1620"/>
+              </a:lnSpc>
+              <a:spcAft>
+                <a:spcPts val="300"/>
+              </a:spcAft>
+              <a:buSzPct val="100000"/>
+              <a:buChar char="•"/>
+            </a:pPr>
+            <a:r>
+              <a:rPr lang="en-US" sz="1200" i="1" dirty="0">
                 <a:solidFill>
                   <a:srgbClr val="2C2C2C"/>
                 </a:solidFill>
@@ -3563,268 +4374,23 @@
                 <a:ea typeface="Verdana" pitchFamily="34" charset="-122"/>
                 <a:cs typeface="Verdana" pitchFamily="34" charset="-120"/>
               </a:rPr>
-              <a:t>Write a 4-row column:</a:t>
+              <a:t>"Today I'm going to show you a magic trick. Older kids — Grade 6, 7, 8 — learn this. You're going to SEE it today. We won't fully learn it until you're older."</a:t>
             </a:r>
             <a:endParaRPr lang="en-US" sz="1200" dirty="0"/>
           </a:p>
-        </p:txBody>
-      </p:sp>
-      <p:sp>
-        <p:nvSpPr>
-          <p:cNvPr id="5" name="Text 3"/>
-          <p:cNvSpPr/>
-          <p:nvPr/>
-        </p:nvSpPr>
-        <p:spPr>
-          <a:xfrm>
-            <a:off x="406301" y="1173063"/>
-            <a:ext cx="8331398" cy="952202"/>
-          </a:xfrm>
-          <a:prstGeom prst="rect">
-            <a:avLst/>
-          </a:prstGeom>
-          <a:solidFill>
-            <a:srgbClr val="FFFFFF"/>
-          </a:solidFill>
-          <a:ln/>
-        </p:spPr>
-        <p:txBody>
-          <a:bodyPr wrap="square" rtlCol="0" anchor="ctr"/>
-          <a:lstStyle/>
-          <a:p>
-            <a:pPr indent="0" marL="0">
-              <a:buNone/>
-            </a:pPr>
-            <a:endParaRPr lang="en-US" dirty="0"/>
-          </a:p>
-        </p:txBody>
-      </p:sp>
-      <p:sp>
-        <p:nvSpPr>
-          <p:cNvPr id="6" name="Shape 4"/>
-          <p:cNvSpPr/>
-          <p:nvPr/>
-        </p:nvSpPr>
-        <p:spPr>
-          <a:xfrm>
-            <a:off x="430113" y="1173063"/>
-            <a:ext cx="0" cy="952202"/>
-          </a:xfrm>
-          <a:prstGeom prst="line">
-            <a:avLst/>
-          </a:prstGeom>
-          <a:noFill/>
-          <a:ln w="47625">
-            <a:solidFill>
-              <a:srgbClr val="87A96B"/>
-            </a:solidFill>
-            <a:prstDash val="solid"/>
-          </a:ln>
-        </p:spPr>
-      </p:sp>
-      <p:sp>
-        <p:nvSpPr>
-          <p:cNvPr id="7" name="Text 5"/>
-          <p:cNvSpPr/>
-          <p:nvPr/>
-        </p:nvSpPr>
-        <p:spPr>
-          <a:xfrm>
-            <a:off x="631627" y="1300014"/>
-            <a:ext cx="8086939" cy="174575"/>
-          </a:xfrm>
-          <a:prstGeom prst="rect">
-            <a:avLst/>
-          </a:prstGeom>
-          <a:noFill/>
-          <a:ln/>
-        </p:spPr>
-        <p:txBody>
-          <a:bodyPr wrap="square" lIns="0" tIns="0" rIns="0" bIns="0" rtlCol="0" anchor="t"/>
-          <a:lstStyle/>
-          <a:p>
-            <a:pPr algn="l" indent="0" marL="0">
-              <a:lnSpc>
-                <a:spcPts val="1375"/>
-              </a:lnSpc>
-              <a:buNone/>
-            </a:pPr>
-            <a:r>
-              <a:rPr lang="en-US" sz="1100" dirty="0">
-                <a:solidFill>
-                  <a:srgbClr val="2C2C2C"/>
-                </a:solidFill>
-                <a:latin typeface="Courier New" pitchFamily="34" charset="0"/>
-                <a:ea typeface="Courier New" pitchFamily="34" charset="-122"/>
-                <a:cs typeface="Courier New" pitchFamily="34" charset="-120"/>
-              </a:rPr>
-              <a:t>5728</a:t>
-            </a:r>
-            <a:endParaRPr lang="en-US" sz="1100" dirty="0"/>
-          </a:p>
-        </p:txBody>
-      </p:sp>
-      <p:sp>
-        <p:nvSpPr>
-          <p:cNvPr id="8" name="Text 6"/>
-          <p:cNvSpPr/>
-          <p:nvPr/>
-        </p:nvSpPr>
-        <p:spPr>
-          <a:xfrm>
-            <a:off x="631627" y="1474589"/>
-            <a:ext cx="8086939" cy="174575"/>
-          </a:xfrm>
-          <a:prstGeom prst="rect">
-            <a:avLst/>
-          </a:prstGeom>
-          <a:noFill/>
-          <a:ln/>
-        </p:spPr>
-        <p:txBody>
-          <a:bodyPr wrap="square" lIns="0" tIns="0" rIns="0" bIns="0" rtlCol="0" anchor="t"/>
-          <a:lstStyle/>
-          <a:p>
-            <a:pPr algn="l" indent="0" marL="0">
-              <a:lnSpc>
-                <a:spcPts val="1375"/>
-              </a:lnSpc>
-              <a:buNone/>
-            </a:pPr>
-            <a:r>
-              <a:rPr lang="en-US" sz="1100" dirty="0">
-                <a:solidFill>
-                  <a:srgbClr val="2C2C2C"/>
-                </a:solidFill>
-                <a:latin typeface="Courier New" pitchFamily="34" charset="0"/>
-                <a:ea typeface="Courier New" pitchFamily="34" charset="-122"/>
-                <a:cs typeface="Courier New" pitchFamily="34" charset="-120"/>
-              </a:rPr>
-              <a:t>3417</a:t>
-            </a:r>
-            <a:endParaRPr lang="en-US" sz="1100" dirty="0"/>
-          </a:p>
-        </p:txBody>
-      </p:sp>
-      <p:sp>
-        <p:nvSpPr>
-          <p:cNvPr id="9" name="Text 7"/>
-          <p:cNvSpPr/>
-          <p:nvPr/>
-        </p:nvSpPr>
-        <p:spPr>
-          <a:xfrm>
-            <a:off x="631627" y="1649164"/>
-            <a:ext cx="8086939" cy="174575"/>
-          </a:xfrm>
-          <a:prstGeom prst="rect">
-            <a:avLst/>
-          </a:prstGeom>
-          <a:noFill/>
-          <a:ln/>
-        </p:spPr>
-        <p:txBody>
-          <a:bodyPr wrap="square" lIns="0" tIns="0" rIns="0" bIns="0" rtlCol="0" anchor="t"/>
-          <a:lstStyle/>
-          <a:p>
-            <a:pPr algn="l" indent="0" marL="0">
-              <a:lnSpc>
-                <a:spcPts val="1375"/>
-              </a:lnSpc>
-              <a:buNone/>
-            </a:pPr>
-            <a:r>
-              <a:rPr lang="en-US" sz="1100" dirty="0">
-                <a:solidFill>
-                  <a:srgbClr val="2C2C2C"/>
-                </a:solidFill>
-                <a:latin typeface="Courier New" pitchFamily="34" charset="0"/>
-                <a:ea typeface="Courier New" pitchFamily="34" charset="-122"/>
-                <a:cs typeface="Courier New" pitchFamily="34" charset="-120"/>
-              </a:rPr>
-              <a:t>6892</a:t>
-            </a:r>
-            <a:endParaRPr lang="en-US" sz="1100" dirty="0"/>
-          </a:p>
-        </p:txBody>
-      </p:sp>
-      <p:sp>
-        <p:nvSpPr>
-          <p:cNvPr id="10" name="Text 8"/>
-          <p:cNvSpPr/>
-          <p:nvPr/>
-        </p:nvSpPr>
-        <p:spPr>
-          <a:xfrm>
-            <a:off x="631627" y="1823740"/>
-            <a:ext cx="8086939" cy="174575"/>
-          </a:xfrm>
-          <a:prstGeom prst="rect">
-            <a:avLst/>
-          </a:prstGeom>
-          <a:noFill/>
-          <a:ln/>
-        </p:spPr>
-        <p:txBody>
-          <a:bodyPr wrap="square" lIns="0" tIns="0" rIns="0" bIns="0" rtlCol="0" anchor="t"/>
-          <a:lstStyle/>
-          <a:p>
-            <a:pPr algn="l" indent="0" marL="0">
-              <a:lnSpc>
-                <a:spcPts val="1375"/>
-              </a:lnSpc>
-              <a:buNone/>
-            </a:pPr>
-            <a:r>
-              <a:rPr lang="en-US" sz="1100" dirty="0">
-                <a:solidFill>
-                  <a:srgbClr val="2C2C2C"/>
-                </a:solidFill>
-                <a:latin typeface="Courier New" pitchFamily="34" charset="0"/>
-                <a:ea typeface="Courier New" pitchFamily="34" charset="-122"/>
-                <a:cs typeface="Courier New" pitchFamily="34" charset="-120"/>
-              </a:rPr>
-              <a:t>4536+</a:t>
-            </a:r>
-            <a:endParaRPr lang="en-US" sz="1100" dirty="0"/>
-          </a:p>
-        </p:txBody>
-      </p:sp>
-      <p:sp>
-        <p:nvSpPr>
-          <p:cNvPr id="11" name="Text 9"/>
-          <p:cNvSpPr/>
-          <p:nvPr/>
-        </p:nvSpPr>
-        <p:spPr>
-          <a:xfrm>
-            <a:off x="406301" y="2214116"/>
-            <a:ext cx="8498026" cy="853083"/>
-          </a:xfrm>
-          <a:prstGeom prst="rect">
-            <a:avLst/>
-          </a:prstGeom>
-          <a:noFill/>
-          <a:ln/>
-        </p:spPr>
-        <p:txBody>
-          <a:bodyPr wrap="square" lIns="0" tIns="0" rIns="0" bIns="0" rtlCol="0" anchor="t"/>
-          <a:lstStyle/>
-          <a:p>
-            <a:pPr algn="l" indent="0" marL="0">
-              <a:lnSpc>
-                <a:spcPts val="1680"/>
-              </a:lnSpc>
-              <a:spcBef>
-                <a:spcPts val="300"/>
-              </a:spcBef>
-              <a:spcAft>
-                <a:spcPts val="300"/>
-              </a:spcAft>
-              <a:buNone/>
-            </a:pPr>
-            <a:r>
-              <a:rPr lang="en-US" sz="1200" dirty="0">
+          <a:p>
+            <a:pPr algn="l" marL="342900" indent="-342900">
+              <a:lnSpc>
+                <a:spcPts val="1620"/>
+              </a:lnSpc>
+              <a:spcAft>
+                <a:spcPts val="300"/>
+              </a:spcAft>
+              <a:buSzPct val="100000"/>
+              <a:buChar char="•"/>
+            </a:pPr>
+            <a:r>
+              <a:rPr lang="en-US" sz="1200" i="1" dirty="0">
                 <a:solidFill>
                   <a:srgbClr val="2C2C2C"/>
                 </a:solidFill>
@@ -3832,40 +4398,12 @@
                 <a:ea typeface="Verdana" pitchFamily="34" charset="-122"/>
                 <a:cs typeface="Verdana" pitchFamily="34" charset="-120"/>
               </a:rPr>
-              <a:t>Solve LIVE with the dot method, narrating: – Units column: 8, 7, 2, 6.   – 8+2 = 10! Put a dot above the 2.   – Now I have 7 and 6 left. 7+6 = 13. That's a 10! Dot above the 6.   – 3 is left over. Write 3 below.   – I have 2 dots. Carry 2. – Tens column: 2, 1, 9, 3 + the carry 2.   – 1+9 = 10. Dot above 9.   – 2+3+2 (carry) = 7.   – Write 7. Carry 1. – Hundreds: 7, 4, 8, 5 + 1.   – Continue. – Thousands.</a:t>
-            </a:r>
-            <a:endParaRPr lang="en-US" sz="1200" dirty="0"/>
-          </a:p>
-        </p:txBody>
-      </p:sp>
-      <p:sp>
-        <p:nvSpPr>
-          <p:cNvPr id="12" name="Text 10"/>
-          <p:cNvSpPr/>
-          <p:nvPr/>
-        </p:nvSpPr>
-        <p:spPr>
-          <a:xfrm>
-            <a:off x="406301" y="3143399"/>
-            <a:ext cx="8498026" cy="213271"/>
-          </a:xfrm>
-          <a:prstGeom prst="rect">
-            <a:avLst/>
-          </a:prstGeom>
-          <a:noFill/>
-          <a:ln/>
-        </p:spPr>
-        <p:txBody>
-          <a:bodyPr wrap="square" lIns="0" tIns="0" rIns="0" bIns="0" rtlCol="0" anchor="t"/>
-          <a:lstStyle/>
-          <a:p>
+              <a:t>"It's called</a:t>
+            </a:r>
             <a:pPr algn="l" indent="0" marL="0">
               <a:lnSpc>
-                <a:spcPts val="1680"/>
-              </a:lnSpc>
-              <a:spcBef>
-                <a:spcPts val="300"/>
-              </a:spcBef>
+                <a:spcPts val="1620"/>
+              </a:lnSpc>
               <a:spcAft>
                 <a:spcPts val="300"/>
               </a:spcAft>
@@ -3880,22 +4418,19 @@
                 <a:ea typeface="Verdana" pitchFamily="34" charset="-122"/>
                 <a:cs typeface="Verdana" pitchFamily="34" charset="-120"/>
               </a:rPr>
-              <a:t>Reveal: </a:t>
+              <a:t> Bindu Paddhati </a:t>
             </a:r>
             <a:pPr algn="l" indent="0" marL="0">
               <a:lnSpc>
-                <a:spcPts val="1680"/>
-              </a:lnSpc>
-              <a:spcBef>
-                <a:spcPts val="300"/>
-              </a:spcBef>
-              <a:spcAft>
-                <a:spcPts val="300"/>
-              </a:spcAft>
-              <a:buNone/>
-            </a:pPr>
-            <a:r>
-              <a:rPr lang="en-US" sz="1200" b="1" dirty="0">
+                <a:spcPts val="1620"/>
+              </a:lnSpc>
+              <a:spcAft>
+                <a:spcPts val="300"/>
+              </a:spcAft>
+              <a:buNone/>
+            </a:pPr>
+            <a:r>
+              <a:rPr lang="en-US" sz="1200" i="1" dirty="0">
                 <a:solidFill>
                   <a:srgbClr val="2C2C2C"/>
                 </a:solidFill>
@@ -3903,30 +4438,7 @@
                 <a:ea typeface="Verdana" pitchFamily="34" charset="-122"/>
                 <a:cs typeface="Verdana" pitchFamily="34" charset="-120"/>
               </a:rPr>
-              <a:t>20573</a:t>
-            </a:r>
-            <a:pPr algn="l" indent="0" marL="0">
-              <a:lnSpc>
-                <a:spcPts val="1680"/>
-              </a:lnSpc>
-              <a:spcBef>
-                <a:spcPts val="300"/>
-              </a:spcBef>
-              <a:spcAft>
-                <a:spcPts val="300"/>
-              </a:spcAft>
-              <a:buNone/>
-            </a:pPr>
-            <a:r>
-              <a:rPr lang="en-US" sz="1200" dirty="0">
-                <a:solidFill>
-                  <a:srgbClr val="2C2C2C"/>
-                </a:solidFill>
-                <a:latin typeface="Verdana" pitchFamily="34" charset="0"/>
-                <a:ea typeface="Verdana" pitchFamily="34" charset="-122"/>
-                <a:cs typeface="Verdana" pitchFamily="34" charset="-120"/>
-              </a:rPr>
-              <a:t>.</a:t>
+              <a:t>— that's Sanskrit for 'dot method.'"</a:t>
             </a:r>
             <a:endParaRPr lang="en-US" sz="1200" dirty="0"/>
           </a:p>
@@ -3934,55 +4446,7 @@
       </p:sp>
       <p:sp>
         <p:nvSpPr>
-          <p:cNvPr id="13" name="Text 11"/>
-          <p:cNvSpPr/>
-          <p:nvPr/>
-        </p:nvSpPr>
-        <p:spPr>
-          <a:xfrm>
-            <a:off x="406301" y="3432870"/>
-            <a:ext cx="8498026" cy="213271"/>
-          </a:xfrm>
-          <a:prstGeom prst="rect">
-            <a:avLst/>
-          </a:prstGeom>
-          <a:noFill/>
-          <a:ln/>
-        </p:spPr>
-        <p:txBody>
-          <a:bodyPr wrap="square" lIns="0" tIns="0" rIns="0" bIns="0" rtlCol="0" anchor="t"/>
-          <a:lstStyle/>
-          <a:p>
-            <a:pPr algn="l" indent="0" marL="0">
-              <a:lnSpc>
-                <a:spcPts val="1680"/>
-              </a:lnSpc>
-              <a:spcBef>
-                <a:spcPts val="300"/>
-              </a:spcBef>
-              <a:spcAft>
-                <a:spcPts val="300"/>
-              </a:spcAft>
-              <a:buNone/>
-            </a:pPr>
-            <a:r>
-              <a:rPr lang="en-US" sz="1200" i="1" dirty="0">
-                <a:solidFill>
-                  <a:srgbClr val="2C2C2C"/>
-                </a:solidFill>
-                <a:latin typeface="Verdana" pitchFamily="34" charset="0"/>
-                <a:ea typeface="Verdana" pitchFamily="34" charset="-122"/>
-                <a:cs typeface="Verdana" pitchFamily="34" charset="-120"/>
-              </a:rPr>
-              <a:t>"How long did that take? About a minute. Try doing this the slow way — much longer."</a:t>
-            </a:r>
-            <a:endParaRPr lang="en-US" sz="1200" dirty="0"/>
-          </a:p>
-        </p:txBody>
-      </p:sp>
-      <p:sp>
-        <p:nvSpPr>
-          <p:cNvPr id="14" name="Text 12"/>
+          <p:cNvPr id="5" name="Text 3"/>
           <p:cNvSpPr/>
           <p:nvPr/>
         </p:nvSpPr>
@@ -4132,7 +4596,7 @@
                 <a:ea typeface="Georgia" pitchFamily="34" charset="-122"/>
                 <a:cs typeface="Georgia" pitchFamily="34" charset="-120"/>
               </a:rPr>
-              <a:t>Awe + connect (8 min)</a:t>
+              <a:t>Live demo (12 min)</a:t>
             </a:r>
             <a:endParaRPr lang="en-US" sz="1800" dirty="0"/>
           </a:p>
@@ -4146,8 +4610,8 @@
         </p:nvSpPr>
         <p:spPr>
           <a:xfrm>
-            <a:off x="634901" y="883593"/>
-            <a:ext cx="8102798" cy="487561"/>
+            <a:off x="406301" y="870942"/>
+            <a:ext cx="8498026" cy="213271"/>
           </a:xfrm>
           <a:prstGeom prst="rect">
             <a:avLst/>
@@ -4159,18 +4623,20 @@
           <a:bodyPr wrap="square" lIns="0" tIns="0" rIns="0" bIns="0" rtlCol="0" anchor="t"/>
           <a:lstStyle/>
           <a:p>
-            <a:pPr algn="l" marL="342900" indent="-342900">
-              <a:lnSpc>
-                <a:spcPts val="1620"/>
-              </a:lnSpc>
-              <a:spcAft>
-                <a:spcPts val="300"/>
-              </a:spcAft>
-              <a:buSzPct val="100000"/>
-              <a:buChar char="•"/>
-            </a:pPr>
-            <a:r>
-              <a:rPr lang="en-US" sz="1200" i="1" dirty="0">
+            <a:pPr algn="l" indent="0" marL="0">
+              <a:lnSpc>
+                <a:spcPts val="1680"/>
+              </a:lnSpc>
+              <a:spcBef>
+                <a:spcPts val="300"/>
+              </a:spcBef>
+              <a:spcAft>
+                <a:spcPts val="300"/>
+              </a:spcAft>
+              <a:buNone/>
+            </a:pPr>
+            <a:r>
+              <a:rPr lang="en-US" sz="1200" dirty="0">
                 <a:solidFill>
                   <a:srgbClr val="2C2C2C"/>
                 </a:solidFill>
@@ -4178,7 +4644,7 @@
                 <a:ea typeface="Verdana" pitchFamily="34" charset="-122"/>
                 <a:cs typeface="Verdana" pitchFamily="34" charset="-120"/>
               </a:rPr>
-              <a:t>"You already know the trick of finding 10-pairs. That's the BIG SKILL behind this magic. When you're in Grade 6, you'll learn the dot method too. For now, keep practising those 10-pairs."</a:t>
+              <a:t>Write a 4-row column:</a:t>
             </a:r>
             <a:endParaRPr lang="en-US" sz="1200" dirty="0"/>
           </a:p>
@@ -4192,13 +4658,66 @@
         </p:nvSpPr>
         <p:spPr>
           <a:xfrm>
-            <a:off x="406301" y="1460004"/>
-            <a:ext cx="8498026" cy="213271"/>
-          </a:xfrm>
-          <a:prstGeom prst="rect">
+            <a:off x="406301" y="1173063"/>
+            <a:ext cx="8331398" cy="952202"/>
+          </a:xfrm>
+          <a:prstGeom prst="rect">
+            <a:avLst/>
+          </a:prstGeom>
+          <a:solidFill>
+            <a:srgbClr val="FFFFFF"/>
+          </a:solidFill>
+          <a:ln/>
+        </p:spPr>
+        <p:txBody>
+          <a:bodyPr wrap="square" rtlCol="0" anchor="ctr"/>
+          <a:lstStyle/>
+          <a:p>
+            <a:pPr indent="0" marL="0">
+              <a:buNone/>
+            </a:pPr>
+            <a:endParaRPr lang="en-US" dirty="0"/>
+          </a:p>
+        </p:txBody>
+      </p:sp>
+      <p:sp>
+        <p:nvSpPr>
+          <p:cNvPr id="6" name="Shape 4"/>
+          <p:cNvSpPr/>
+          <p:nvPr/>
+        </p:nvSpPr>
+        <p:spPr>
+          <a:xfrm>
+            <a:off x="430113" y="1173063"/>
+            <a:ext cx="0" cy="952202"/>
+          </a:xfrm>
+          <a:prstGeom prst="line">
             <a:avLst/>
           </a:prstGeom>
           <a:noFill/>
+          <a:ln w="47625">
+            <a:solidFill>
+              <a:srgbClr val="87A96B"/>
+            </a:solidFill>
+            <a:prstDash val="solid"/>
+          </a:ln>
+        </p:spPr>
+      </p:sp>
+      <p:sp>
+        <p:nvSpPr>
+          <p:cNvPr id="7" name="Text 5"/>
+          <p:cNvSpPr/>
+          <p:nvPr/>
+        </p:nvSpPr>
+        <p:spPr>
+          <a:xfrm>
+            <a:off x="631627" y="1300014"/>
+            <a:ext cx="8086939" cy="174575"/>
+          </a:xfrm>
+          <a:prstGeom prst="rect">
+            <a:avLst/>
+          </a:prstGeom>
+          <a:noFill/>
           <a:ln/>
         </p:spPr>
         <p:txBody>
@@ -4207,34 +4726,154 @@
           <a:p>
             <a:pPr algn="l" indent="0" marL="0">
               <a:lnSpc>
-                <a:spcPts val="1680"/>
-              </a:lnSpc>
-              <a:spcBef>
-                <a:spcPts val="300"/>
-              </a:spcBef>
-              <a:spcAft>
-                <a:spcPts val="300"/>
-              </a:spcAft>
-              <a:buNone/>
-            </a:pPr>
-            <a:r>
-              <a:rPr lang="en-US" sz="1200" dirty="0">
+                <a:spcPts val="1375"/>
+              </a:lnSpc>
+              <a:buNone/>
+            </a:pPr>
+            <a:r>
+              <a:rPr lang="en-US" sz="1100" dirty="0">
                 <a:solidFill>
                   <a:srgbClr val="2C2C2C"/>
                 </a:solidFill>
-                <a:latin typeface="Verdana" pitchFamily="34" charset="0"/>
-                <a:ea typeface="Verdana" pitchFamily="34" charset="-122"/>
-                <a:cs typeface="Verdana" pitchFamily="34" charset="-120"/>
-              </a:rPr>
-              <a:t>– Class chorus of all 5 pairs.</a:t>
-            </a:r>
-            <a:endParaRPr lang="en-US" sz="1200" dirty="0"/>
-          </a:p>
-        </p:txBody>
-      </p:sp>
-      <p:sp>
-        <p:nvSpPr>
-          <p:cNvPr id="6" name="Text 4"/>
+                <a:latin typeface="Courier New" pitchFamily="34" charset="0"/>
+                <a:ea typeface="Courier New" pitchFamily="34" charset="-122"/>
+                <a:cs typeface="Courier New" pitchFamily="34" charset="-120"/>
+              </a:rPr>
+              <a:t>5728</a:t>
+            </a:r>
+            <a:endParaRPr lang="en-US" sz="1100" dirty="0"/>
+          </a:p>
+        </p:txBody>
+      </p:sp>
+      <p:sp>
+        <p:nvSpPr>
+          <p:cNvPr id="8" name="Text 6"/>
+          <p:cNvSpPr/>
+          <p:nvPr/>
+        </p:nvSpPr>
+        <p:spPr>
+          <a:xfrm>
+            <a:off x="631627" y="1474589"/>
+            <a:ext cx="8086939" cy="174575"/>
+          </a:xfrm>
+          <a:prstGeom prst="rect">
+            <a:avLst/>
+          </a:prstGeom>
+          <a:noFill/>
+          <a:ln/>
+        </p:spPr>
+        <p:txBody>
+          <a:bodyPr wrap="square" lIns="0" tIns="0" rIns="0" bIns="0" rtlCol="0" anchor="t"/>
+          <a:lstStyle/>
+          <a:p>
+            <a:pPr algn="l" indent="0" marL="0">
+              <a:lnSpc>
+                <a:spcPts val="1375"/>
+              </a:lnSpc>
+              <a:buNone/>
+            </a:pPr>
+            <a:r>
+              <a:rPr lang="en-US" sz="1100" dirty="0">
+                <a:solidFill>
+                  <a:srgbClr val="2C2C2C"/>
+                </a:solidFill>
+                <a:latin typeface="Courier New" pitchFamily="34" charset="0"/>
+                <a:ea typeface="Courier New" pitchFamily="34" charset="-122"/>
+                <a:cs typeface="Courier New" pitchFamily="34" charset="-120"/>
+              </a:rPr>
+              <a:t>3417</a:t>
+            </a:r>
+            <a:endParaRPr lang="en-US" sz="1100" dirty="0"/>
+          </a:p>
+        </p:txBody>
+      </p:sp>
+      <p:sp>
+        <p:nvSpPr>
+          <p:cNvPr id="9" name="Text 7"/>
+          <p:cNvSpPr/>
+          <p:nvPr/>
+        </p:nvSpPr>
+        <p:spPr>
+          <a:xfrm>
+            <a:off x="631627" y="1649164"/>
+            <a:ext cx="8086939" cy="174575"/>
+          </a:xfrm>
+          <a:prstGeom prst="rect">
+            <a:avLst/>
+          </a:prstGeom>
+          <a:noFill/>
+          <a:ln/>
+        </p:spPr>
+        <p:txBody>
+          <a:bodyPr wrap="square" lIns="0" tIns="0" rIns="0" bIns="0" rtlCol="0" anchor="t"/>
+          <a:lstStyle/>
+          <a:p>
+            <a:pPr algn="l" indent="0" marL="0">
+              <a:lnSpc>
+                <a:spcPts val="1375"/>
+              </a:lnSpc>
+              <a:buNone/>
+            </a:pPr>
+            <a:r>
+              <a:rPr lang="en-US" sz="1100" dirty="0">
+                <a:solidFill>
+                  <a:srgbClr val="2C2C2C"/>
+                </a:solidFill>
+                <a:latin typeface="Courier New" pitchFamily="34" charset="0"/>
+                <a:ea typeface="Courier New" pitchFamily="34" charset="-122"/>
+                <a:cs typeface="Courier New" pitchFamily="34" charset="-120"/>
+              </a:rPr>
+              <a:t>6892</a:t>
+            </a:r>
+            <a:endParaRPr lang="en-US" sz="1100" dirty="0"/>
+          </a:p>
+        </p:txBody>
+      </p:sp>
+      <p:sp>
+        <p:nvSpPr>
+          <p:cNvPr id="10" name="Text 8"/>
+          <p:cNvSpPr/>
+          <p:nvPr/>
+        </p:nvSpPr>
+        <p:spPr>
+          <a:xfrm>
+            <a:off x="631627" y="1823740"/>
+            <a:ext cx="8086939" cy="174575"/>
+          </a:xfrm>
+          <a:prstGeom prst="rect">
+            <a:avLst/>
+          </a:prstGeom>
+          <a:noFill/>
+          <a:ln/>
+        </p:spPr>
+        <p:txBody>
+          <a:bodyPr wrap="square" lIns="0" tIns="0" rIns="0" bIns="0" rtlCol="0" anchor="t"/>
+          <a:lstStyle/>
+          <a:p>
+            <a:pPr algn="l" indent="0" marL="0">
+              <a:lnSpc>
+                <a:spcPts val="1375"/>
+              </a:lnSpc>
+              <a:buNone/>
+            </a:pPr>
+            <a:r>
+              <a:rPr lang="en-US" sz="1100" dirty="0">
+                <a:solidFill>
+                  <a:srgbClr val="2C2C2C"/>
+                </a:solidFill>
+                <a:latin typeface="Courier New" pitchFamily="34" charset="0"/>
+                <a:ea typeface="Courier New" pitchFamily="34" charset="-122"/>
+                <a:cs typeface="Courier New" pitchFamily="34" charset="-120"/>
+              </a:rPr>
+              <a:t>4536+</a:t>
+            </a:r>
+            <a:endParaRPr lang="en-US" sz="1100" dirty="0"/>
+          </a:p>
+        </p:txBody>
+      </p:sp>
+      <p:sp>
+        <p:nvSpPr>
+          <p:cNvPr id="11" name="Text 9"/>
           <p:cNvSpPr/>
           <p:nvPr/>
         </p:nvSpPr>
@@ -4384,7 +5023,7 @@
                 <a:ea typeface="Georgia" pitchFamily="34" charset="-122"/>
                 <a:cs typeface="Georgia" pitchFamily="34" charset="-120"/>
               </a:rPr>
-              <a:t>Show + chant (2 min)</a:t>
+              <a:t>Live demo (12 min) (cont.)</a:t>
             </a:r>
             <a:endParaRPr lang="en-US" sz="1800" dirty="0"/>
           </a:p>
@@ -4432,7 +5071,7 @@
                 <a:ea typeface="Verdana" pitchFamily="34" charset="-122"/>
                 <a:cs typeface="Verdana" pitchFamily="34" charset="-120"/>
               </a:rPr>
-              <a:t>Close.</a:t>
+              <a:t>Solve LIVE with the dot method, narrating:</a:t>
             </a:r>
             <a:endParaRPr lang="en-US" sz="1200" dirty="0"/>
           </a:p>
@@ -4441,6 +5080,316 @@
       <p:sp>
         <p:nvSpPr>
           <p:cNvPr id="5" name="Text 3"/>
+          <p:cNvSpPr/>
+          <p:nvPr/>
+        </p:nvSpPr>
+        <p:spPr>
+          <a:xfrm>
+            <a:off x="634901" y="1173063"/>
+            <a:ext cx="8102798" cy="2963466"/>
+          </a:xfrm>
+          <a:prstGeom prst="rect">
+            <a:avLst/>
+          </a:prstGeom>
+          <a:noFill/>
+          <a:ln/>
+        </p:spPr>
+        <p:txBody>
+          <a:bodyPr wrap="square" lIns="0" tIns="0" rIns="0" bIns="0" rtlCol="0" anchor="t"/>
+          <a:lstStyle/>
+          <a:p>
+            <a:pPr algn="l" marL="342900" indent="-342900">
+              <a:lnSpc>
+                <a:spcPts val="1620"/>
+              </a:lnSpc>
+              <a:spcAft>
+                <a:spcPts val="300"/>
+              </a:spcAft>
+              <a:buSzPct val="100000"/>
+              <a:buChar char="•"/>
+            </a:pPr>
+            <a:r>
+              <a:rPr lang="en-US" sz="1200" dirty="0">
+                <a:solidFill>
+                  <a:srgbClr val="2C2C2C"/>
+                </a:solidFill>
+                <a:latin typeface="Verdana" pitchFamily="34" charset="0"/>
+                <a:ea typeface="Verdana" pitchFamily="34" charset="-122"/>
+                <a:cs typeface="Verdana" pitchFamily="34" charset="-120"/>
+              </a:rPr>
+              <a:t>Units column: 8, 7, 2, 6.</a:t>
+            </a:r>
+            <a:endParaRPr lang="en-US" sz="1200" dirty="0"/>
+          </a:p>
+          <a:p>
+            <a:pPr algn="l" marL="342900" indent="-342900">
+              <a:lnSpc>
+                <a:spcPts val="1620"/>
+              </a:lnSpc>
+              <a:spcAft>
+                <a:spcPts val="300"/>
+              </a:spcAft>
+              <a:buSzPct val="100000"/>
+              <a:buChar char="•"/>
+            </a:pPr>
+            <a:r>
+              <a:rPr lang="en-US" sz="1200" dirty="0">
+                <a:solidFill>
+                  <a:srgbClr val="2C2C2C"/>
+                </a:solidFill>
+                <a:latin typeface="Verdana" pitchFamily="34" charset="0"/>
+                <a:ea typeface="Verdana" pitchFamily="34" charset="-122"/>
+                <a:cs typeface="Verdana" pitchFamily="34" charset="-120"/>
+              </a:rPr>
+              <a:t>8+2 = 10! Put a dot above the 2.</a:t>
+            </a:r>
+            <a:endParaRPr lang="en-US" sz="1200" dirty="0"/>
+          </a:p>
+          <a:p>
+            <a:pPr algn="l" marL="342900" indent="-342900">
+              <a:lnSpc>
+                <a:spcPts val="1620"/>
+              </a:lnSpc>
+              <a:spcAft>
+                <a:spcPts val="300"/>
+              </a:spcAft>
+              <a:buSzPct val="100000"/>
+              <a:buChar char="•"/>
+            </a:pPr>
+            <a:r>
+              <a:rPr lang="en-US" sz="1200" dirty="0">
+                <a:solidFill>
+                  <a:srgbClr val="2C2C2C"/>
+                </a:solidFill>
+                <a:latin typeface="Verdana" pitchFamily="34" charset="0"/>
+                <a:ea typeface="Verdana" pitchFamily="34" charset="-122"/>
+                <a:cs typeface="Verdana" pitchFamily="34" charset="-120"/>
+              </a:rPr>
+              <a:t>Now I have 7 and 6 left. 7+6 = 13. That's a 10! Dot above the 6.</a:t>
+            </a:r>
+            <a:endParaRPr lang="en-US" sz="1200" dirty="0"/>
+          </a:p>
+          <a:p>
+            <a:pPr algn="l" marL="342900" indent="-342900">
+              <a:lnSpc>
+                <a:spcPts val="1620"/>
+              </a:lnSpc>
+              <a:spcAft>
+                <a:spcPts val="300"/>
+              </a:spcAft>
+              <a:buSzPct val="100000"/>
+              <a:buChar char="•"/>
+            </a:pPr>
+            <a:r>
+              <a:rPr lang="en-US" sz="1200" dirty="0">
+                <a:solidFill>
+                  <a:srgbClr val="2C2C2C"/>
+                </a:solidFill>
+                <a:latin typeface="Verdana" pitchFamily="34" charset="0"/>
+                <a:ea typeface="Verdana" pitchFamily="34" charset="-122"/>
+                <a:cs typeface="Verdana" pitchFamily="34" charset="-120"/>
+              </a:rPr>
+              <a:t>3 is left over. Write 3 below.</a:t>
+            </a:r>
+            <a:endParaRPr lang="en-US" sz="1200" dirty="0"/>
+          </a:p>
+          <a:p>
+            <a:pPr algn="l" marL="342900" indent="-342900">
+              <a:lnSpc>
+                <a:spcPts val="1620"/>
+              </a:lnSpc>
+              <a:spcAft>
+                <a:spcPts val="300"/>
+              </a:spcAft>
+              <a:buSzPct val="100000"/>
+              <a:buChar char="•"/>
+            </a:pPr>
+            <a:r>
+              <a:rPr lang="en-US" sz="1200" dirty="0">
+                <a:solidFill>
+                  <a:srgbClr val="2C2C2C"/>
+                </a:solidFill>
+                <a:latin typeface="Verdana" pitchFamily="34" charset="0"/>
+                <a:ea typeface="Verdana" pitchFamily="34" charset="-122"/>
+                <a:cs typeface="Verdana" pitchFamily="34" charset="-120"/>
+              </a:rPr>
+              <a:t>I have 2 dots. Carry 2.</a:t>
+            </a:r>
+            <a:endParaRPr lang="en-US" sz="1200" dirty="0"/>
+          </a:p>
+          <a:p>
+            <a:pPr algn="l" marL="342900" indent="-342900">
+              <a:lnSpc>
+                <a:spcPts val="1620"/>
+              </a:lnSpc>
+              <a:spcAft>
+                <a:spcPts val="300"/>
+              </a:spcAft>
+              <a:buSzPct val="100000"/>
+              <a:buChar char="•"/>
+            </a:pPr>
+            <a:r>
+              <a:rPr lang="en-US" sz="1200" dirty="0">
+                <a:solidFill>
+                  <a:srgbClr val="2C2C2C"/>
+                </a:solidFill>
+                <a:latin typeface="Verdana" pitchFamily="34" charset="0"/>
+                <a:ea typeface="Verdana" pitchFamily="34" charset="-122"/>
+                <a:cs typeface="Verdana" pitchFamily="34" charset="-120"/>
+              </a:rPr>
+              <a:t>Tens column: 2, 1, 9, 3 + the carry 2.</a:t>
+            </a:r>
+            <a:endParaRPr lang="en-US" sz="1200" dirty="0"/>
+          </a:p>
+          <a:p>
+            <a:pPr algn="l" marL="342900" indent="-342900">
+              <a:lnSpc>
+                <a:spcPts val="1620"/>
+              </a:lnSpc>
+              <a:spcAft>
+                <a:spcPts val="300"/>
+              </a:spcAft>
+              <a:buSzPct val="100000"/>
+              <a:buChar char="•"/>
+            </a:pPr>
+            <a:r>
+              <a:rPr lang="en-US" sz="1200" dirty="0">
+                <a:solidFill>
+                  <a:srgbClr val="2C2C2C"/>
+                </a:solidFill>
+                <a:latin typeface="Verdana" pitchFamily="34" charset="0"/>
+                <a:ea typeface="Verdana" pitchFamily="34" charset="-122"/>
+                <a:cs typeface="Verdana" pitchFamily="34" charset="-120"/>
+              </a:rPr>
+              <a:t>1+9 = 10. Dot above 9.</a:t>
+            </a:r>
+            <a:endParaRPr lang="en-US" sz="1200" dirty="0"/>
+          </a:p>
+          <a:p>
+            <a:pPr algn="l" marL="342900" indent="-342900">
+              <a:lnSpc>
+                <a:spcPts val="1620"/>
+              </a:lnSpc>
+              <a:spcAft>
+                <a:spcPts val="300"/>
+              </a:spcAft>
+              <a:buSzPct val="100000"/>
+              <a:buChar char="•"/>
+            </a:pPr>
+            <a:r>
+              <a:rPr lang="en-US" sz="1200" dirty="0">
+                <a:solidFill>
+                  <a:srgbClr val="2C2C2C"/>
+                </a:solidFill>
+                <a:latin typeface="Verdana" pitchFamily="34" charset="0"/>
+                <a:ea typeface="Verdana" pitchFamily="34" charset="-122"/>
+                <a:cs typeface="Verdana" pitchFamily="34" charset="-120"/>
+              </a:rPr>
+              <a:t>2+3+2 (carry) = 7.</a:t>
+            </a:r>
+            <a:endParaRPr lang="en-US" sz="1200" dirty="0"/>
+          </a:p>
+          <a:p>
+            <a:pPr algn="l" marL="342900" indent="-342900">
+              <a:lnSpc>
+                <a:spcPts val="1620"/>
+              </a:lnSpc>
+              <a:spcAft>
+                <a:spcPts val="300"/>
+              </a:spcAft>
+              <a:buSzPct val="100000"/>
+              <a:buChar char="•"/>
+            </a:pPr>
+            <a:r>
+              <a:rPr lang="en-US" sz="1200" dirty="0">
+                <a:solidFill>
+                  <a:srgbClr val="2C2C2C"/>
+                </a:solidFill>
+                <a:latin typeface="Verdana" pitchFamily="34" charset="0"/>
+                <a:ea typeface="Verdana" pitchFamily="34" charset="-122"/>
+                <a:cs typeface="Verdana" pitchFamily="34" charset="-120"/>
+              </a:rPr>
+              <a:t>Write 7. Carry 1.</a:t>
+            </a:r>
+            <a:endParaRPr lang="en-US" sz="1200" dirty="0"/>
+          </a:p>
+          <a:p>
+            <a:pPr algn="l" marL="342900" indent="-342900">
+              <a:lnSpc>
+                <a:spcPts val="1620"/>
+              </a:lnSpc>
+              <a:spcAft>
+                <a:spcPts val="300"/>
+              </a:spcAft>
+              <a:buSzPct val="100000"/>
+              <a:buChar char="•"/>
+            </a:pPr>
+            <a:r>
+              <a:rPr lang="en-US" sz="1200" dirty="0">
+                <a:solidFill>
+                  <a:srgbClr val="2C2C2C"/>
+                </a:solidFill>
+                <a:latin typeface="Verdana" pitchFamily="34" charset="0"/>
+                <a:ea typeface="Verdana" pitchFamily="34" charset="-122"/>
+                <a:cs typeface="Verdana" pitchFamily="34" charset="-120"/>
+              </a:rPr>
+              <a:t>Hundreds: 7, 4, 8, 5 + 1.</a:t>
+            </a:r>
+            <a:endParaRPr lang="en-US" sz="1200" dirty="0"/>
+          </a:p>
+          <a:p>
+            <a:pPr algn="l" marL="342900" indent="-342900">
+              <a:lnSpc>
+                <a:spcPts val="1620"/>
+              </a:lnSpc>
+              <a:spcAft>
+                <a:spcPts val="300"/>
+              </a:spcAft>
+              <a:buSzPct val="100000"/>
+              <a:buChar char="•"/>
+            </a:pPr>
+            <a:r>
+              <a:rPr lang="en-US" sz="1200" dirty="0">
+                <a:solidFill>
+                  <a:srgbClr val="2C2C2C"/>
+                </a:solidFill>
+                <a:latin typeface="Verdana" pitchFamily="34" charset="0"/>
+                <a:ea typeface="Verdana" pitchFamily="34" charset="-122"/>
+                <a:cs typeface="Verdana" pitchFamily="34" charset="-120"/>
+              </a:rPr>
+              <a:t>Continue.</a:t>
+            </a:r>
+            <a:endParaRPr lang="en-US" sz="1200" dirty="0"/>
+          </a:p>
+          <a:p>
+            <a:pPr algn="l" marL="342900" indent="-342900">
+              <a:lnSpc>
+                <a:spcPts val="1620"/>
+              </a:lnSpc>
+              <a:spcAft>
+                <a:spcPts val="300"/>
+              </a:spcAft>
+              <a:buSzPct val="100000"/>
+              <a:buChar char="•"/>
+            </a:pPr>
+            <a:r>
+              <a:rPr lang="en-US" sz="1200" dirty="0">
+                <a:solidFill>
+                  <a:srgbClr val="2C2C2C"/>
+                </a:solidFill>
+                <a:latin typeface="Verdana" pitchFamily="34" charset="0"/>
+                <a:ea typeface="Verdana" pitchFamily="34" charset="-122"/>
+                <a:cs typeface="Verdana" pitchFamily="34" charset="-120"/>
+              </a:rPr>
+              <a:t>Thousands.</a:t>
+            </a:r>
+            <a:endParaRPr lang="en-US" sz="1200" dirty="0"/>
+          </a:p>
+        </p:txBody>
+      </p:sp>
+      <p:sp>
+        <p:nvSpPr>
+          <p:cNvPr id="6" name="Text 4"/>
           <p:cNvSpPr/>
           <p:nvPr/>
         </p:nvSpPr>
@@ -4590,7 +5539,7 @@
                 <a:ea typeface="Georgia" pitchFamily="34" charset="-122"/>
                 <a:cs typeface="Georgia" pitchFamily="34" charset="-120"/>
               </a:rPr>
-              <a:t>Homework</a:t>
+              <a:t>Live demo (12 min) (cont.)</a:t>
             </a:r>
             <a:endParaRPr lang="en-US" sz="1800" dirty="0"/>
           </a:p>
@@ -4638,7 +5587,53 @@
                 <a:ea typeface="Verdana" pitchFamily="34" charset="-122"/>
                 <a:cs typeface="Verdana" pitchFamily="34" charset="-120"/>
               </a:rPr>
-              <a:t>– Teach the chant to a younger child at home. They'll be ready when they're older.</a:t>
+              <a:t>Reveal: </a:t>
+            </a:r>
+            <a:pPr algn="l" indent="0" marL="0">
+              <a:lnSpc>
+                <a:spcPts val="1680"/>
+              </a:lnSpc>
+              <a:spcBef>
+                <a:spcPts val="300"/>
+              </a:spcBef>
+              <a:spcAft>
+                <a:spcPts val="300"/>
+              </a:spcAft>
+              <a:buNone/>
+            </a:pPr>
+            <a:r>
+              <a:rPr lang="en-US" sz="1200" b="1" dirty="0">
+                <a:solidFill>
+                  <a:srgbClr val="2C2C2C"/>
+                </a:solidFill>
+                <a:latin typeface="Verdana" pitchFamily="34" charset="0"/>
+                <a:ea typeface="Verdana" pitchFamily="34" charset="-122"/>
+                <a:cs typeface="Verdana" pitchFamily="34" charset="-120"/>
+              </a:rPr>
+              <a:t>20573</a:t>
+            </a:r>
+            <a:pPr algn="l" indent="0" marL="0">
+              <a:lnSpc>
+                <a:spcPts val="1680"/>
+              </a:lnSpc>
+              <a:spcBef>
+                <a:spcPts val="300"/>
+              </a:spcBef>
+              <a:spcAft>
+                <a:spcPts val="300"/>
+              </a:spcAft>
+              <a:buNone/>
+            </a:pPr>
+            <a:r>
+              <a:rPr lang="en-US" sz="1200" dirty="0">
+                <a:solidFill>
+                  <a:srgbClr val="2C2C2C"/>
+                </a:solidFill>
+                <a:latin typeface="Verdana" pitchFamily="34" charset="0"/>
+                <a:ea typeface="Verdana" pitchFamily="34" charset="-122"/>
+                <a:cs typeface="Verdana" pitchFamily="34" charset="-120"/>
+              </a:rPr>
+              <a:t>.</a:t>
             </a:r>
             <a:endParaRPr lang="en-US" sz="1200" dirty="0"/>
           </a:p>
@@ -4647,6 +5642,54 @@
       <p:sp>
         <p:nvSpPr>
           <p:cNvPr id="5" name="Text 3"/>
+          <p:cNvSpPr/>
+          <p:nvPr/>
+        </p:nvSpPr>
+        <p:spPr>
+          <a:xfrm>
+            <a:off x="406301" y="1160413"/>
+            <a:ext cx="8498026" cy="213271"/>
+          </a:xfrm>
+          <a:prstGeom prst="rect">
+            <a:avLst/>
+          </a:prstGeom>
+          <a:noFill/>
+          <a:ln/>
+        </p:spPr>
+        <p:txBody>
+          <a:bodyPr wrap="square" lIns="0" tIns="0" rIns="0" bIns="0" rtlCol="0" anchor="t"/>
+          <a:lstStyle/>
+          <a:p>
+            <a:pPr algn="l" indent="0" marL="0">
+              <a:lnSpc>
+                <a:spcPts val="1680"/>
+              </a:lnSpc>
+              <a:spcBef>
+                <a:spcPts val="300"/>
+              </a:spcBef>
+              <a:spcAft>
+                <a:spcPts val="300"/>
+              </a:spcAft>
+              <a:buNone/>
+            </a:pPr>
+            <a:r>
+              <a:rPr lang="en-US" sz="1200" i="1" dirty="0">
+                <a:solidFill>
+                  <a:srgbClr val="2C2C2C"/>
+                </a:solidFill>
+                <a:latin typeface="Verdana" pitchFamily="34" charset="0"/>
+                <a:ea typeface="Verdana" pitchFamily="34" charset="-122"/>
+                <a:cs typeface="Verdana" pitchFamily="34" charset="-120"/>
+              </a:rPr>
+              <a:t>"How long did that take? About a minute. Try doing this the slow way — much longer."</a:t>
+            </a:r>
+            <a:endParaRPr lang="en-US" sz="1200" dirty="0"/>
+          </a:p>
+        </p:txBody>
+      </p:sp>
+      <p:sp>
+        <p:nvSpPr>
+          <p:cNvPr id="6" name="Text 4"/>
           <p:cNvSpPr/>
           <p:nvPr/>
         </p:nvSpPr>
